--- a/deck/붕붕이_3DLabs_제안.pptx
+++ b/deck/붕붕이_3DLabs_제안.pptx
@@ -6664,7 +6664,7 @@
   <p:cSld name="Slide 10">
     <p:spTree>
       <p:nvGrpSpPr>
-        <p:cNvPr id="1" name=""/>
+        <p:cNvPr id="2" name=""/>
         <p:cNvGrpSpPr/>
         <p:nvPr/>
       </p:nvGrpSpPr>
@@ -6678,7 +6678,7 @@
       </p:grpSpPr>
       <p:sp>
         <p:nvSpPr>
-          <p:cNvPr id="2" name="Text 0"/>
+          <p:cNvPr id="3" name="Text 0"/>
           <p:cNvSpPr/>
           <p:nvPr>
             <p:ph idx="100" type="title" hasCustomPrompt="1"/>
@@ -6716,7 +6716,7 @@
       </p:sp>
       <p:sp>
         <p:nvSpPr>
-          <p:cNvPr id="3" name="Text 1"/>
+          <p:cNvPr id="4" name="Text 1"/>
           <p:cNvSpPr txBox="1"/>
           <p:nvPr/>
         </p:nvSpPr>
@@ -6752,7 +6752,7 @@
       </p:sp>
       <p:sp>
         <p:nvSpPr>
-          <p:cNvPr id="4" name="stat 유입량 추정 (경남 연안)"/>
+          <p:cNvPr id="5" name="stat 유입량 추정 (경남 연안)"/>
           <p:cNvSpPr/>
           <p:nvPr/>
         </p:nvSpPr>
@@ -6779,7 +6779,7 @@
       </p:sp>
       <p:sp>
         <p:nvSpPr>
-          <p:cNvPr id="5" name="Text 3"/>
+          <p:cNvPr id="6" name="Text 3"/>
           <p:cNvSpPr txBox="1"/>
           <p:nvPr/>
         </p:nvSpPr>
@@ -6815,7 +6815,7 @@
       </p:sp>
       <p:sp>
         <p:nvSpPr>
-          <p:cNvPr id="6" name="Text 4"/>
+          <p:cNvPr id="7" name="Text 4"/>
           <p:cNvSpPr txBox="1"/>
           <p:nvPr/>
         </p:nvSpPr>
@@ -6862,7 +6862,7 @@
       </p:sp>
       <p:sp>
         <p:nvSpPr>
-          <p:cNvPr id="7" name="Text 5"/>
+          <p:cNvPr id="8" name="Text 5"/>
           <p:cNvSpPr txBox="1"/>
           <p:nvPr/>
         </p:nvSpPr>
@@ -6898,7 +6898,7 @@
       </p:sp>
       <p:sp>
         <p:nvSpPr>
-          <p:cNvPr id="8" name="stat 거제 (통영 190 t)"/>
+          <p:cNvPr id="9" name="stat 거제 (통영 190 t)"/>
           <p:cNvSpPr/>
           <p:nvPr/>
         </p:nvSpPr>
@@ -6925,7 +6925,7 @@
       </p:sp>
       <p:sp>
         <p:nvSpPr>
-          <p:cNvPr id="9" name="Text 7"/>
+          <p:cNvPr id="10" name="Text 7"/>
           <p:cNvSpPr txBox="1"/>
           <p:nvPr/>
         </p:nvSpPr>
@@ -6961,7 +6961,7 @@
       </p:sp>
       <p:sp>
         <p:nvSpPr>
-          <p:cNvPr id="10" name="Text 8"/>
+          <p:cNvPr id="11" name="Text 8"/>
           <p:cNvSpPr txBox="1"/>
           <p:nvPr/>
         </p:nvSpPr>
@@ -7008,7 +7008,7 @@
       </p:sp>
       <p:sp>
         <p:nvSpPr>
-          <p:cNvPr id="11" name="Text 9"/>
+          <p:cNvPr id="12" name="Text 9"/>
           <p:cNvSpPr txBox="1"/>
           <p:nvPr/>
         </p:nvSpPr>
@@ -7044,7 +7044,7 @@
       </p:sp>
       <p:sp>
         <p:nvSpPr>
-          <p:cNvPr id="12" name="stat 96% 수거까지 (8/15 → 9/9)"/>
+          <p:cNvPr id="13" name="stat 96% 수거까지 (8/15 → 9/9)"/>
           <p:cNvSpPr/>
           <p:nvPr/>
         </p:nvSpPr>
@@ -7071,7 +7071,7 @@
       </p:sp>
       <p:sp>
         <p:nvSpPr>
-          <p:cNvPr id="13" name="Text 11"/>
+          <p:cNvPr id="14" name="Text 11"/>
           <p:cNvSpPr txBox="1"/>
           <p:nvPr/>
         </p:nvSpPr>
@@ -7107,7 +7107,7 @@
       </p:sp>
       <p:sp>
         <p:nvSpPr>
-          <p:cNvPr id="14" name="Text 12"/>
+          <p:cNvPr id="15" name="Text 12"/>
           <p:cNvSpPr txBox="1"/>
           <p:nvPr/>
         </p:nvSpPr>
@@ -7146,7 +7146,7 @@
       </p:sp>
       <p:sp>
         <p:nvSpPr>
-          <p:cNvPr id="15" name="Text 13"/>
+          <p:cNvPr id="16" name="Text 13"/>
           <p:cNvSpPr txBox="1"/>
           <p:nvPr/>
         </p:nvSpPr>
@@ -7182,7 +7182,7 @@
       </p:sp>
       <p:sp>
         <p:nvSpPr>
-          <p:cNvPr id="16" name="stat 2011년 거제 관광수입 손실"/>
+          <p:cNvPr id="17" name="stat 2011년 거제 관광수입 손실"/>
           <p:cNvSpPr/>
           <p:nvPr/>
         </p:nvSpPr>
@@ -7209,7 +7209,7 @@
       </p:sp>
       <p:sp>
         <p:nvSpPr>
-          <p:cNvPr id="17" name="Text 15"/>
+          <p:cNvPr id="18" name="Text 15"/>
           <p:cNvSpPr txBox="1"/>
           <p:nvPr/>
         </p:nvSpPr>
@@ -7245,7 +7245,7 @@
       </p:sp>
       <p:sp>
         <p:nvSpPr>
-          <p:cNvPr id="18" name="Text 16"/>
+          <p:cNvPr id="19" name="Text 16"/>
           <p:cNvSpPr txBox="1"/>
           <p:nvPr/>
         </p:nvSpPr>
@@ -7284,7 +7284,7 @@
       </p:sp>
       <p:sp>
         <p:nvSpPr>
-          <p:cNvPr id="19" name="Text 17"/>
+          <p:cNvPr id="20" name="Text 17"/>
           <p:cNvSpPr txBox="1"/>
           <p:nvPr/>
         </p:nvSpPr>
@@ -7320,7 +7320,7 @@
       </p:sp>
       <p:sp>
         <p:nvSpPr>
-          <p:cNvPr id="20" name="insight card"/>
+          <p:cNvPr id="21" name="insight card"/>
           <p:cNvSpPr/>
           <p:nvPr/>
         </p:nvSpPr>
@@ -7347,7 +7347,7 @@
       </p:sp>
       <p:sp>
         <p:nvSpPr>
-          <p:cNvPr id="21" name="icon circle"/>
+          <p:cNvPr id="22" name="icon circle"/>
           <p:cNvSpPr/>
           <p:nvPr/>
         </p:nvSpPr>
@@ -7372,7 +7372,7 @@
       </p:sp>
       <p:pic>
         <p:nvPicPr>
-          <p:cNvPr id="22" name="icon truck" descr="preencoded.png">    </p:cNvPr>
+          <p:cNvPr id="23" name="icon truck" descr="preencoded.png">    </p:cNvPr>
           <p:cNvPicPr>
             <a:picLocks noChangeAspect="1"/>
           </p:cNvPicPr>
@@ -7396,7 +7396,7 @@
       </p:pic>
       <p:sp>
         <p:nvSpPr>
-          <p:cNvPr id="23" name="Text 20"/>
+          <p:cNvPr id="24" name="Text 20"/>
           <p:cNvSpPr txBox="1"/>
           <p:nvPr/>
         </p:nvSpPr>
@@ -7432,7 +7432,7 @@
       </p:sp>
       <p:sp>
         <p:nvSpPr>
-          <p:cNvPr id="24" name="Text 21"/>
+          <p:cNvPr id="25" name="Text 21"/>
           <p:cNvSpPr txBox="1"/>
           <p:nvPr/>
         </p:nvSpPr>
@@ -7468,7 +7468,7 @@
       </p:sp>
       <p:sp>
         <p:nvSpPr>
-          <p:cNvPr id="25" name="source"/>
+          <p:cNvPr id="26" name="source"/>
           <p:cNvSpPr txBox="1"/>
           <p:nvPr/>
         </p:nvSpPr>
@@ -7504,7 +7504,7 @@
       </p:sp>
       <p:sp>
         <p:nvSpPr>
-          <p:cNvPr id="25" name="Slide Number Placeholder 0"/>
+          <p:cNvPr id="27" name="Slide Number Placeholder 0"/>
           <p:cNvSpPr>
             <a:spLocks noGrp="1"/>
           </p:cNvSpPr>
@@ -7697,7 +7697,7 @@
   <p:cSld name="Slide 12">
     <p:spTree>
       <p:nvGrpSpPr>
-        <p:cNvPr id="1" name=""/>
+        <p:cNvPr id="2" name=""/>
         <p:cNvGrpSpPr/>
         <p:nvPr/>
       </p:nvGrpSpPr>
@@ -7711,7 +7711,7 @@
       </p:grpSpPr>
       <p:sp>
         <p:nvSpPr>
-          <p:cNvPr id="2" name="Text 0"/>
+          <p:cNvPr id="3" name="Text 0"/>
           <p:cNvSpPr/>
           <p:nvPr>
             <p:ph idx="100" type="title" hasCustomPrompt="1"/>
@@ -7749,7 +7749,7 @@
       </p:sp>
       <p:sp>
         <p:nvSpPr>
-          <p:cNvPr id="3" name="subtitle"/>
+          <p:cNvPr id="4" name="subtitle"/>
           <p:cNvSpPr txBox="1"/>
           <p:nvPr/>
         </p:nvSpPr>
@@ -7785,7 +7785,7 @@
       </p:sp>
       <p:sp>
         <p:nvSpPr>
-          <p:cNvPr id="4" name="card 선별: 어디를 날지 고른다"/>
+          <p:cNvPr id="5" name="card 선별: 어디를 날지 고른다"/>
           <p:cNvSpPr/>
           <p:nvPr/>
         </p:nvSpPr>
@@ -7819,7 +7819,7 @@
       </p:sp>
       <p:sp>
         <p:nvSpPr>
-          <p:cNvPr id="5" name="icon circle"/>
+          <p:cNvPr id="6" name="icon circle"/>
           <p:cNvSpPr/>
           <p:nvPr/>
         </p:nvSpPr>
@@ -7844,7 +7844,7 @@
       </p:sp>
       <p:pic>
         <p:nvPicPr>
-          <p:cNvPr id="6" name="icon FaSatellite" descr="preencoded.png">    </p:cNvPr>
+          <p:cNvPr id="7" name="icon FaSatellite" descr="preencoded.png">    </p:cNvPr>
           <p:cNvPicPr>
             <a:picLocks noChangeAspect="1"/>
           </p:cNvPicPr>
@@ -7868,7 +7868,7 @@
       </p:pic>
       <p:sp>
         <p:nvSpPr>
-          <p:cNvPr id="7" name="Text 4"/>
+          <p:cNvPr id="8" name="Text 4"/>
           <p:cNvSpPr txBox="1"/>
           <p:nvPr/>
         </p:nvSpPr>
@@ -7904,7 +7904,7 @@
       </p:sp>
       <p:sp>
         <p:nvSpPr>
-          <p:cNvPr id="8" name="Text 5"/>
+          <p:cNvPr id="9" name="Text 5"/>
           <p:cNvSpPr txBox="1"/>
           <p:nvPr/>
         </p:nvSpPr>
@@ -7943,7 +7943,7 @@
       </p:sp>
       <p:sp>
         <p:nvSpPr>
-          <p:cNvPr id="9" name="card 측정: 무엇이 어디에 얼마나 있는지 잰다"/>
+          <p:cNvPr id="10" name="card 측정: 무엇이 어디에 얼마나 있는지 잰다"/>
           <p:cNvSpPr/>
           <p:nvPr/>
         </p:nvSpPr>
@@ -7977,7 +7977,7 @@
       </p:sp>
       <p:sp>
         <p:nvSpPr>
-          <p:cNvPr id="10" name="icon circle"/>
+          <p:cNvPr id="11" name="icon circle"/>
           <p:cNvSpPr/>
           <p:nvPr/>
         </p:nvSpPr>
@@ -8002,7 +8002,7 @@
       </p:sp>
       <p:pic>
         <p:nvPicPr>
-          <p:cNvPr id="11" name="icon FaCubes" descr="preencoded.png">    </p:cNvPr>
+          <p:cNvPr id="12" name="icon FaCubes" descr="preencoded.png">    </p:cNvPr>
           <p:cNvPicPr>
             <a:picLocks noChangeAspect="1"/>
           </p:cNvPicPr>
@@ -8026,7 +8026,7 @@
       </p:pic>
       <p:sp>
         <p:nvSpPr>
-          <p:cNvPr id="12" name="Text 8"/>
+          <p:cNvPr id="13" name="Text 8"/>
           <p:cNvSpPr txBox="1"/>
           <p:nvPr/>
         </p:nvSpPr>
@@ -8062,7 +8062,7 @@
       </p:sp>
       <p:sp>
         <p:nvSpPr>
-          <p:cNvPr id="13" name="Text 9"/>
+          <p:cNvPr id="14" name="Text 9"/>
           <p:cNvSpPr txBox="1"/>
           <p:nvPr/>
         </p:nvSpPr>
@@ -8101,7 +8101,7 @@
       </p:sp>
       <p:sp>
         <p:nvSpPr>
-          <p:cNvPr id="14" name="step 어디를 날지"/>
+          <p:cNvPr id="15" name="step 어디를 날지"/>
           <p:cNvSpPr/>
           <p:nvPr/>
         </p:nvSpPr>
@@ -8128,7 +8128,7 @@
       </p:sp>
       <p:sp>
         <p:nvSpPr>
-          <p:cNvPr id="15" name="icon circle"/>
+          <p:cNvPr id="16" name="icon circle"/>
           <p:cNvSpPr/>
           <p:nvPr/>
         </p:nvSpPr>
@@ -8153,7 +8153,7 @@
       </p:sp>
       <p:pic>
         <p:nvPicPr>
-          <p:cNvPr id="16" name="icon FaSatellite" descr="preencoded.png">    </p:cNvPr>
+          <p:cNvPr id="17" name="icon FaSatellite" descr="preencoded.png">    </p:cNvPr>
           <p:cNvPicPr>
             <a:picLocks noChangeAspect="1"/>
           </p:cNvPicPr>
@@ -8177,7 +8177,7 @@
       </p:pic>
       <p:sp>
         <p:nvSpPr>
-          <p:cNvPr id="17" name="Text 12"/>
+          <p:cNvPr id="18" name="Text 12"/>
           <p:cNvSpPr txBox="1"/>
           <p:nvPr/>
         </p:nvSpPr>
@@ -8213,7 +8213,7 @@
       </p:sp>
       <p:sp>
         <p:nvSpPr>
-          <p:cNvPr id="18" name="Text 13"/>
+          <p:cNvPr id="19" name="Text 13"/>
           <p:cNvSpPr txBox="1"/>
           <p:nvPr/>
         </p:nvSpPr>
@@ -8249,7 +8249,7 @@
       </p:sp>
       <p:sp>
         <p:nvSpPr>
-          <p:cNvPr id="19" name="step 조종자 비행"/>
+          <p:cNvPr id="20" name="step 조종자 비행"/>
           <p:cNvSpPr/>
           <p:nvPr/>
         </p:nvSpPr>
@@ -8276,7 +8276,7 @@
       </p:sp>
       <p:sp>
         <p:nvSpPr>
-          <p:cNvPr id="20" name="icon circle"/>
+          <p:cNvPr id="21" name="icon circle"/>
           <p:cNvSpPr/>
           <p:nvPr/>
         </p:nvSpPr>
@@ -8301,7 +8301,7 @@
       </p:sp>
       <p:pic>
         <p:nvPicPr>
-          <p:cNvPr id="21" name="icon FaPlane" descr="preencoded.png">    </p:cNvPr>
+          <p:cNvPr id="22" name="icon FaPlane" descr="preencoded.png">    </p:cNvPr>
           <p:cNvPicPr>
             <a:picLocks noChangeAspect="1"/>
           </p:cNvPicPr>
@@ -8325,7 +8325,7 @@
       </p:pic>
       <p:sp>
         <p:nvSpPr>
-          <p:cNvPr id="22" name="Text 16"/>
+          <p:cNvPr id="23" name="Text 16"/>
           <p:cNvSpPr txBox="1"/>
           <p:nvPr/>
         </p:nvSpPr>
@@ -8361,7 +8361,7 @@
       </p:sp>
       <p:sp>
         <p:nvSpPr>
-          <p:cNvPr id="23" name="Text 17"/>
+          <p:cNvPr id="24" name="Text 17"/>
           <p:cNvSpPr txBox="1"/>
           <p:nvPr/>
         </p:nvSpPr>
@@ -8397,7 +8397,7 @@
       </p:sp>
       <p:sp>
         <p:nvSpPr>
-          <p:cNvPr id="24" name="step 탐지"/>
+          <p:cNvPr id="25" name="step 탐지"/>
           <p:cNvSpPr/>
           <p:nvPr/>
         </p:nvSpPr>
@@ -8424,7 +8424,7 @@
       </p:sp>
       <p:sp>
         <p:nvSpPr>
-          <p:cNvPr id="25" name="icon circle"/>
+          <p:cNvPr id="26" name="icon circle"/>
           <p:cNvSpPr/>
           <p:nvPr/>
         </p:nvSpPr>
@@ -8449,7 +8449,7 @@
       </p:sp>
       <p:pic>
         <p:nvPicPr>
-          <p:cNvPr id="26" name="icon FaSearchLocation" descr="preencoded.png">    </p:cNvPr>
+          <p:cNvPr id="27" name="icon FaSearchLocation" descr="preencoded.png">    </p:cNvPr>
           <p:cNvPicPr>
             <a:picLocks noChangeAspect="1"/>
           </p:cNvPicPr>
@@ -8473,7 +8473,7 @@
       </p:pic>
       <p:sp>
         <p:nvSpPr>
-          <p:cNvPr id="27" name="Text 20"/>
+          <p:cNvPr id="28" name="Text 20"/>
           <p:cNvSpPr txBox="1"/>
           <p:nvPr/>
         </p:nvSpPr>
@@ -8509,7 +8509,7 @@
       </p:sp>
       <p:sp>
         <p:nvSpPr>
-          <p:cNvPr id="28" name="Text 21"/>
+          <p:cNvPr id="29" name="Text 21"/>
           <p:cNvSpPr txBox="1"/>
           <p:nvPr/>
         </p:nvSpPr>
@@ -8545,7 +8545,7 @@
       </p:sp>
       <p:sp>
         <p:nvSpPr>
-          <p:cNvPr id="29" name="step 위치"/>
+          <p:cNvPr id="30" name="step 위치"/>
           <p:cNvSpPr/>
           <p:nvPr/>
         </p:nvSpPr>
@@ -8572,7 +8572,7 @@
       </p:sp>
       <p:sp>
         <p:nvSpPr>
-          <p:cNvPr id="30" name="icon circle"/>
+          <p:cNvPr id="31" name="icon circle"/>
           <p:cNvSpPr/>
           <p:nvPr/>
         </p:nvSpPr>
@@ -8597,7 +8597,7 @@
       </p:sp>
       <p:pic>
         <p:nvPicPr>
-          <p:cNvPr id="31" name="icon FaCrosshairs" descr="preencoded.png">    </p:cNvPr>
+          <p:cNvPr id="32" name="icon FaCrosshairs" descr="preencoded.png">    </p:cNvPr>
           <p:cNvPicPr>
             <a:picLocks noChangeAspect="1"/>
           </p:cNvPicPr>
@@ -8621,7 +8621,7 @@
       </p:pic>
       <p:sp>
         <p:nvSpPr>
-          <p:cNvPr id="32" name="Text 24"/>
+          <p:cNvPr id="33" name="Text 24"/>
           <p:cNvSpPr txBox="1"/>
           <p:nvPr/>
         </p:nvSpPr>
@@ -8657,7 +8657,7 @@
       </p:sp>
       <p:sp>
         <p:nvSpPr>
-          <p:cNvPr id="33" name="Text 25"/>
+          <p:cNvPr id="34" name="Text 25"/>
           <p:cNvSpPr txBox="1"/>
           <p:nvPr/>
         </p:nvSpPr>
@@ -8693,7 +8693,7 @@
       </p:sp>
       <p:sp>
         <p:nvSpPr>
-          <p:cNvPr id="34" name="step 부피"/>
+          <p:cNvPr id="35" name="step 부피"/>
           <p:cNvSpPr/>
           <p:nvPr/>
         </p:nvSpPr>
@@ -8720,7 +8720,7 @@
       </p:sp>
       <p:sp>
         <p:nvSpPr>
-          <p:cNvPr id="35" name="icon circle"/>
+          <p:cNvPr id="36" name="icon circle"/>
           <p:cNvSpPr/>
           <p:nvPr/>
         </p:nvSpPr>
@@ -8745,7 +8745,7 @@
       </p:sp>
       <p:pic>
         <p:nvPicPr>
-          <p:cNvPr id="36" name="icon FaCubes" descr="preencoded.png">    </p:cNvPr>
+          <p:cNvPr id="37" name="icon FaCubes" descr="preencoded.png">    </p:cNvPr>
           <p:cNvPicPr>
             <a:picLocks noChangeAspect="1"/>
           </p:cNvPicPr>
@@ -8769,7 +8769,7 @@
       </p:pic>
       <p:sp>
         <p:nvSpPr>
-          <p:cNvPr id="37" name="Text 28"/>
+          <p:cNvPr id="38" name="Text 28"/>
           <p:cNvSpPr txBox="1"/>
           <p:nvPr/>
         </p:nvSpPr>
@@ -8805,7 +8805,7 @@
       </p:sp>
       <p:sp>
         <p:nvSpPr>
-          <p:cNvPr id="38" name="Text 29"/>
+          <p:cNvPr id="39" name="Text 29"/>
           <p:cNvSpPr txBox="1"/>
           <p:nvPr/>
         </p:nvSpPr>
@@ -8841,7 +8841,7 @@
       </p:sp>
       <p:sp>
         <p:nvSpPr>
-          <p:cNvPr id="39" name="step 무게 구간"/>
+          <p:cNvPr id="40" name="step 무게 구간"/>
           <p:cNvSpPr/>
           <p:nvPr/>
         </p:nvSpPr>
@@ -8868,7 +8868,7 @@
       </p:sp>
       <p:sp>
         <p:nvSpPr>
-          <p:cNvPr id="40" name="icon circle"/>
+          <p:cNvPr id="41" name="icon circle"/>
           <p:cNvSpPr/>
           <p:nvPr/>
         </p:nvSpPr>
@@ -8893,7 +8893,7 @@
       </p:sp>
       <p:pic>
         <p:nvPicPr>
-          <p:cNvPr id="41" name="icon FaRulerCombined" descr="preencoded.png">    </p:cNvPr>
+          <p:cNvPr id="42" name="icon FaRulerCombined" descr="preencoded.png">    </p:cNvPr>
           <p:cNvPicPr>
             <a:picLocks noChangeAspect="1"/>
           </p:cNvPicPr>
@@ -8917,7 +8917,7 @@
       </p:pic>
       <p:sp>
         <p:nvSpPr>
-          <p:cNvPr id="42" name="Text 32"/>
+          <p:cNvPr id="43" name="Text 32"/>
           <p:cNvSpPr txBox="1"/>
           <p:nvPr/>
         </p:nvSpPr>
@@ -8953,7 +8953,7 @@
       </p:sp>
       <p:sp>
         <p:nvSpPr>
-          <p:cNvPr id="43" name="Text 33"/>
+          <p:cNvPr id="44" name="Text 33"/>
           <p:cNvSpPr txBox="1"/>
           <p:nvPr/>
         </p:nvSpPr>
@@ -8989,7 +8989,7 @@
       </p:sp>
       <p:sp>
         <p:nvSpPr>
-          <p:cNvPr id="44" name="step 수거계획"/>
+          <p:cNvPr id="45" name="step 수거계획"/>
           <p:cNvSpPr/>
           <p:nvPr/>
         </p:nvSpPr>
@@ -9016,7 +9016,7 @@
       </p:sp>
       <p:sp>
         <p:nvSpPr>
-          <p:cNvPr id="45" name="icon circle"/>
+          <p:cNvPr id="46" name="icon circle"/>
           <p:cNvSpPr/>
           <p:nvPr/>
         </p:nvSpPr>
@@ -9041,7 +9041,7 @@
       </p:sp>
       <p:pic>
         <p:nvPicPr>
-          <p:cNvPr id="46" name="icon FaTruck" descr="preencoded.png">    </p:cNvPr>
+          <p:cNvPr id="47" name="icon FaTruck" descr="preencoded.png">    </p:cNvPr>
           <p:cNvPicPr>
             <a:picLocks noChangeAspect="1"/>
           </p:cNvPicPr>
@@ -9065,7 +9065,7 @@
       </p:pic>
       <p:sp>
         <p:nvSpPr>
-          <p:cNvPr id="47" name="Text 36"/>
+          <p:cNvPr id="48" name="Text 36"/>
           <p:cNvSpPr txBox="1"/>
           <p:nvPr/>
         </p:nvSpPr>
@@ -9101,7 +9101,7 @@
       </p:sp>
       <p:sp>
         <p:nvSpPr>
-          <p:cNvPr id="48" name="Text 37"/>
+          <p:cNvPr id="49" name="Text 37"/>
           <p:cNvSpPr txBox="1"/>
           <p:nvPr/>
         </p:nvSpPr>
@@ -9137,7 +9137,7 @@
       </p:sp>
       <p:sp>
         <p:nvSpPr>
-          <p:cNvPr id="49" name="io"/>
+          <p:cNvPr id="50" name="io"/>
           <p:cNvSpPr/>
           <p:nvPr/>
         </p:nvSpPr>
@@ -9164,7 +9164,7 @@
       </p:sp>
       <p:sp>
         <p:nvSpPr>
-          <p:cNvPr id="50" name="Text 39"/>
+          <p:cNvPr id="51" name="Text 39"/>
           <p:cNvSpPr txBox="1"/>
           <p:nvPr/>
         </p:nvSpPr>
@@ -9200,7 +9200,7 @@
       </p:sp>
       <p:sp>
         <p:nvSpPr>
-          <p:cNvPr id="25" name="Slide Number Placeholder 0"/>
+          <p:cNvPr id="52" name="Slide Number Placeholder 0"/>
           <p:cNvSpPr>
             <a:spLocks noGrp="1"/>
           </p:cNvSpPr>
@@ -10588,7 +10588,7 @@
   <p:cSld name="Slide 15">
     <p:spTree>
       <p:nvGrpSpPr>
-        <p:cNvPr id="1" name=""/>
+        <p:cNvPr id="2" name=""/>
         <p:cNvGrpSpPr/>
         <p:nvPr/>
       </p:nvGrpSpPr>
@@ -10602,7 +10602,7 @@
       </p:grpSpPr>
       <p:sp>
         <p:nvSpPr>
-          <p:cNvPr id="2" name="Text 0"/>
+          <p:cNvPr id="3" name="Text 0"/>
           <p:cNvSpPr/>
           <p:nvPr>
             <p:ph idx="100" type="title" hasCustomPrompt="1"/>
@@ -10640,7 +10640,7 @@
       </p:sp>
       <p:sp>
         <p:nvSpPr>
-          <p:cNvPr id="3" name="subtitle"/>
+          <p:cNvPr id="4" name="subtitle"/>
           <p:cNvSpPr txBox="1"/>
           <p:nvPr/>
         </p:nvSpPr>
@@ -10676,7 +10676,7 @@
       </p:sp>
       <p:sp>
         <p:nvSpPr>
-          <p:cNvPr id="4" name="gsd card"/>
+          <p:cNvPr id="5" name="gsd card"/>
           <p:cNvSpPr/>
           <p:nvPr/>
         </p:nvSpPr>
@@ -10710,7 +10710,7 @@
       </p:sp>
       <p:sp>
         <p:nvSpPr>
-          <p:cNvPr id="5" name="Text 3"/>
+          <p:cNvPr id="6" name="Text 3"/>
           <p:cNvSpPr txBox="1"/>
           <p:nvPr/>
         </p:nvSpPr>
@@ -10746,7 +10746,7 @@
       </p:sp>
       <p:graphicFrame>
         <p:nvGraphicFramePr>
-          <p:cNvPr id="16" name="gsd table"/>
+          <p:cNvPr id="7" name="gsd table"/>
           <p:cNvGraphicFramePr>
             <a:graphicFrameLocks noGrp="1"/>
           </p:cNvGraphicFramePr>
@@ -12252,7 +12252,7 @@
       </p:graphicFrame>
       <p:sp>
         <p:nvSpPr>
-          <p:cNvPr id="7" name="Text 4"/>
+          <p:cNvPr id="8" name="Text 4"/>
           <p:cNvSpPr txBox="1"/>
           <p:nvPr/>
         </p:nvSpPr>
@@ -12288,7 +12288,7 @@
       </p:sp>
       <p:sp>
         <p:nvSpPr>
-          <p:cNvPr id="8" name="card 탐지: 권고 GSD 0.5~1.25 cm/px"/>
+          <p:cNvPr id="9" name="card 탐지: 권고 GSD 0.5~1.25 cm/px"/>
           <p:cNvSpPr/>
           <p:nvPr/>
         </p:nvSpPr>
@@ -12322,7 +12322,7 @@
       </p:sp>
       <p:sp>
         <p:nvSpPr>
-          <p:cNvPr id="9" name="Text 6"/>
+          <p:cNvPr id="10" name="Text 6"/>
           <p:cNvSpPr txBox="1"/>
           <p:nvPr/>
         </p:nvSpPr>
@@ -12358,7 +12358,7 @@
       </p:sp>
       <p:sp>
         <p:nvSpPr>
-          <p:cNvPr id="10" name="Text 7"/>
+          <p:cNvPr id="11" name="Text 7"/>
           <p:cNvSpPr txBox="1"/>
           <p:nvPr/>
         </p:nvSpPr>
@@ -12397,7 +12397,7 @@
       </p:sp>
       <p:sp>
         <p:nvSpPr>
-          <p:cNvPr id="11" name="card 3D 부피: 17 m·5 mm/px로 충분 (Kako 2020)"/>
+          <p:cNvPr id="12" name="card 3D 부피: 17 m·5 mm/px로 충분 (Kako 2020)"/>
           <p:cNvSpPr/>
           <p:nvPr/>
         </p:nvSpPr>
@@ -12431,7 +12431,7 @@
       </p:sp>
       <p:sp>
         <p:nvSpPr>
-          <p:cNvPr id="12" name="Text 9"/>
+          <p:cNvPr id="13" name="Text 9"/>
           <p:cNvSpPr txBox="1"/>
           <p:nvPr/>
         </p:nvSpPr>
@@ -12467,7 +12467,7 @@
       </p:sp>
       <p:sp>
         <p:nvSpPr>
-          <p:cNvPr id="13" name="Text 10"/>
+          <p:cNvPr id="14" name="Text 10"/>
           <p:cNvSpPr txBox="1"/>
           <p:nvPr/>
         </p:nvSpPr>
@@ -12506,7 +12506,7 @@
       </p:sp>
       <p:sp>
         <p:nvSpPr>
-          <p:cNvPr id="14" name="guide card"/>
+          <p:cNvPr id="15" name="guide card"/>
           <p:cNvSpPr/>
           <p:nvPr/>
         </p:nvSpPr>
@@ -12533,7 +12533,7 @@
       </p:sp>
       <p:pic>
         <p:nvPicPr>
-          <p:cNvPr id="15" name="icon camera" descr="preencoded.png">    </p:cNvPr>
+          <p:cNvPr id="16" name="icon camera" descr="preencoded.png">    </p:cNvPr>
           <p:cNvPicPr>
             <a:picLocks noChangeAspect="1"/>
           </p:cNvPicPr>
@@ -12557,7 +12557,7 @@
       </p:pic>
       <p:sp>
         <p:nvSpPr>
-          <p:cNvPr id="16" name="Text 12"/>
+          <p:cNvPr id="17" name="Text 12"/>
           <p:cNvSpPr txBox="1"/>
           <p:nvPr/>
         </p:nvSpPr>
@@ -12593,7 +12593,7 @@
       </p:sp>
       <p:sp>
         <p:nvSpPr>
-          <p:cNvPr id="17" name="Text 13"/>
+          <p:cNvPr id="18" name="Text 13"/>
           <p:cNvSpPr txBox="1"/>
           <p:nvPr/>
         </p:nvSpPr>
@@ -12629,7 +12629,7 @@
       </p:sp>
       <p:sp>
         <p:nvSpPr>
-          <p:cNvPr id="18" name="refs"/>
+          <p:cNvPr id="19" name="refs"/>
           <p:cNvSpPr txBox="1"/>
           <p:nvPr/>
         </p:nvSpPr>
@@ -12665,7 +12665,7 @@
       </p:sp>
       <p:sp>
         <p:nvSpPr>
-          <p:cNvPr id="25" name="Slide Number Placeholder 0"/>
+          <p:cNvPr id="20" name="Slide Number Placeholder 0"/>
           <p:cNvSpPr>
             <a:spLocks noGrp="1"/>
           </p:cNvSpPr>
@@ -13434,7 +13434,7 @@
   <p:cSld name="Slide 17">
     <p:spTree>
       <p:nvGrpSpPr>
-        <p:cNvPr id="1" name=""/>
+        <p:cNvPr id="2" name=""/>
         <p:cNvGrpSpPr/>
         <p:nvPr/>
       </p:nvGrpSpPr>
@@ -13448,7 +13448,7 @@
       </p:grpSpPr>
       <p:sp>
         <p:nvSpPr>
-          <p:cNvPr id="2" name="Text 0"/>
+          <p:cNvPr id="3" name="Text 0"/>
           <p:cNvSpPr/>
           <p:nvPr>
             <p:ph idx="100" type="title" hasCustomPrompt="1"/>
@@ -13486,7 +13486,7 @@
       </p:sp>
       <p:sp>
         <p:nvSpPr>
-          <p:cNvPr id="3" name="subtitle"/>
+          <p:cNvPr id="4" name="subtitle"/>
           <p:cNvSpPr txBox="1"/>
           <p:nvPr/>
         </p:nvSpPr>
@@ -13522,7 +13522,7 @@
       </p:sp>
       <p:sp>
         <p:nvSpPr>
-          <p:cNvPr id="4" name="Text 2"/>
+          <p:cNvPr id="5" name="Text 2"/>
           <p:cNvSpPr txBox="1"/>
           <p:nvPr/>
         </p:nvSpPr>
@@ -13558,7 +13558,7 @@
       </p:sp>
       <p:sp>
         <p:nvSpPr>
-          <p:cNvPr id="5" name="Text 3"/>
+          <p:cNvPr id="6" name="Text 3"/>
           <p:cNvSpPr txBox="1"/>
           <p:nvPr/>
         </p:nvSpPr>
@@ -13594,7 +13594,7 @@
       </p:sp>
       <p:sp>
         <p:nvSpPr>
-          <p:cNvPr id="6" name="Text 4"/>
+          <p:cNvPr id="7" name="Text 4"/>
           <p:cNvSpPr txBox="1"/>
           <p:nvPr/>
         </p:nvSpPr>
@@ -13630,7 +13630,7 @@
       </p:sp>
       <p:sp>
         <p:nvSpPr>
-          <p:cNvPr id="7" name="fp layer 1"/>
+          <p:cNvPr id="8" name="fp layer 1"/>
           <p:cNvSpPr/>
           <p:nvPr/>
         </p:nvSpPr>
@@ -13664,7 +13664,7 @@
       </p:sp>
       <p:sp>
         <p:nvSpPr>
-          <p:cNvPr id="8" name="fp num"/>
+          <p:cNvPr id="9" name="fp num"/>
           <p:cNvSpPr/>
           <p:nvPr/>
         </p:nvSpPr>
@@ -13689,7 +13689,7 @@
       </p:sp>
       <p:sp>
         <p:nvSpPr>
-          <p:cNvPr id="9" name="Text 7"/>
+          <p:cNvPr id="10" name="Text 7"/>
           <p:cNvSpPr txBox="1"/>
           <p:nvPr/>
         </p:nvSpPr>
@@ -13725,7 +13725,7 @@
       </p:sp>
       <p:sp>
         <p:nvSpPr>
-          <p:cNvPr id="10" name="Text 8"/>
+          <p:cNvPr id="11" name="Text 8"/>
           <p:cNvSpPr txBox="1"/>
           <p:nvPr/>
         </p:nvSpPr>
@@ -13761,7 +13761,7 @@
       </p:sp>
       <p:sp>
         <p:nvSpPr>
-          <p:cNvPr id="11" name="Text 9"/>
+          <p:cNvPr id="12" name="Text 9"/>
           <p:cNvSpPr txBox="1"/>
           <p:nvPr/>
         </p:nvSpPr>
@@ -13797,7 +13797,7 @@
       </p:sp>
       <p:sp>
         <p:nvSpPr>
-          <p:cNvPr id="12" name="Text 10"/>
+          <p:cNvPr id="13" name="Text 10"/>
           <p:cNvSpPr txBox="1"/>
           <p:nvPr/>
         </p:nvSpPr>
@@ -13833,7 +13833,7 @@
       </p:sp>
       <p:sp>
         <p:nvSpPr>
-          <p:cNvPr id="13" name="Text 11"/>
+          <p:cNvPr id="14" name="Text 11"/>
           <p:cNvSpPr txBox="1"/>
           <p:nvPr/>
         </p:nvSpPr>
@@ -13869,7 +13869,7 @@
       </p:sp>
       <p:sp>
         <p:nvSpPr>
-          <p:cNvPr id="14" name="fp layer 2"/>
+          <p:cNvPr id="15" name="fp layer 2"/>
           <p:cNvSpPr/>
           <p:nvPr/>
         </p:nvSpPr>
@@ -13903,7 +13903,7 @@
       </p:sp>
       <p:sp>
         <p:nvSpPr>
-          <p:cNvPr id="15" name="fp num"/>
+          <p:cNvPr id="16" name="fp num"/>
           <p:cNvSpPr/>
           <p:nvPr/>
         </p:nvSpPr>
@@ -13928,7 +13928,7 @@
       </p:sp>
       <p:sp>
         <p:nvSpPr>
-          <p:cNvPr id="16" name="Text 14"/>
+          <p:cNvPr id="17" name="Text 14"/>
           <p:cNvSpPr txBox="1"/>
           <p:nvPr/>
         </p:nvSpPr>
@@ -13964,7 +13964,7 @@
       </p:sp>
       <p:sp>
         <p:nvSpPr>
-          <p:cNvPr id="17" name="Text 15"/>
+          <p:cNvPr id="18" name="Text 15"/>
           <p:cNvSpPr txBox="1"/>
           <p:nvPr/>
         </p:nvSpPr>
@@ -14000,7 +14000,7 @@
       </p:sp>
       <p:sp>
         <p:nvSpPr>
-          <p:cNvPr id="18" name="Text 16"/>
+          <p:cNvPr id="19" name="Text 16"/>
           <p:cNvSpPr txBox="1"/>
           <p:nvPr/>
         </p:nvSpPr>
@@ -14036,7 +14036,7 @@
       </p:sp>
       <p:sp>
         <p:nvSpPr>
-          <p:cNvPr id="19" name="Text 17"/>
+          <p:cNvPr id="20" name="Text 17"/>
           <p:cNvSpPr txBox="1"/>
           <p:nvPr/>
         </p:nvSpPr>
@@ -14072,7 +14072,7 @@
       </p:sp>
       <p:sp>
         <p:nvSpPr>
-          <p:cNvPr id="20" name="Text 18"/>
+          <p:cNvPr id="21" name="Text 18"/>
           <p:cNvSpPr txBox="1"/>
           <p:nvPr/>
         </p:nvSpPr>
@@ -14108,7 +14108,7 @@
       </p:sp>
       <p:sp>
         <p:nvSpPr>
-          <p:cNvPr id="21" name="fp layer 3"/>
+          <p:cNvPr id="22" name="fp layer 3"/>
           <p:cNvSpPr/>
           <p:nvPr/>
         </p:nvSpPr>
@@ -14142,7 +14142,7 @@
       </p:sp>
       <p:sp>
         <p:nvSpPr>
-          <p:cNvPr id="22" name="fp num"/>
+          <p:cNvPr id="23" name="fp num"/>
           <p:cNvSpPr/>
           <p:nvPr/>
         </p:nvSpPr>
@@ -14167,7 +14167,7 @@
       </p:sp>
       <p:sp>
         <p:nvSpPr>
-          <p:cNvPr id="23" name="Text 21"/>
+          <p:cNvPr id="24" name="Text 21"/>
           <p:cNvSpPr txBox="1"/>
           <p:nvPr/>
         </p:nvSpPr>
@@ -14203,7 +14203,7 @@
       </p:sp>
       <p:sp>
         <p:nvSpPr>
-          <p:cNvPr id="24" name="Text 22"/>
+          <p:cNvPr id="25" name="Text 22"/>
           <p:cNvSpPr txBox="1"/>
           <p:nvPr/>
         </p:nvSpPr>
@@ -14239,7 +14239,7 @@
       </p:sp>
       <p:sp>
         <p:nvSpPr>
-          <p:cNvPr id="25" name="Text 23"/>
+          <p:cNvPr id="26" name="Text 23"/>
           <p:cNvSpPr txBox="1"/>
           <p:nvPr/>
         </p:nvSpPr>
@@ -14275,7 +14275,7 @@
       </p:sp>
       <p:sp>
         <p:nvSpPr>
-          <p:cNvPr id="26" name="Text 24"/>
+          <p:cNvPr id="27" name="Text 24"/>
           <p:cNvSpPr txBox="1"/>
           <p:nvPr/>
         </p:nvSpPr>
@@ -14311,7 +14311,7 @@
       </p:sp>
       <p:sp>
         <p:nvSpPr>
-          <p:cNvPr id="27" name="Text 25"/>
+          <p:cNvPr id="28" name="Text 25"/>
           <p:cNvSpPr txBox="1"/>
           <p:nvPr/>
         </p:nvSpPr>
@@ -14347,7 +14347,7 @@
       </p:sp>
       <p:sp>
         <p:nvSpPr>
-          <p:cNvPr id="28" name="fp layer 4"/>
+          <p:cNvPr id="29" name="fp layer 4"/>
           <p:cNvSpPr/>
           <p:nvPr/>
         </p:nvSpPr>
@@ -14381,7 +14381,7 @@
       </p:sp>
       <p:sp>
         <p:nvSpPr>
-          <p:cNvPr id="29" name="fp num"/>
+          <p:cNvPr id="30" name="fp num"/>
           <p:cNvSpPr/>
           <p:nvPr/>
         </p:nvSpPr>
@@ -14406,7 +14406,7 @@
       </p:sp>
       <p:sp>
         <p:nvSpPr>
-          <p:cNvPr id="30" name="Text 28"/>
+          <p:cNvPr id="31" name="Text 28"/>
           <p:cNvSpPr txBox="1"/>
           <p:nvPr/>
         </p:nvSpPr>
@@ -14442,7 +14442,7 @@
       </p:sp>
       <p:sp>
         <p:nvSpPr>
-          <p:cNvPr id="31" name="Text 29"/>
+          <p:cNvPr id="32" name="Text 29"/>
           <p:cNvSpPr txBox="1"/>
           <p:nvPr/>
         </p:nvSpPr>
@@ -14478,7 +14478,7 @@
       </p:sp>
       <p:sp>
         <p:nvSpPr>
-          <p:cNvPr id="32" name="Text 30"/>
+          <p:cNvPr id="33" name="Text 30"/>
           <p:cNvSpPr txBox="1"/>
           <p:nvPr/>
         </p:nvSpPr>
@@ -14514,7 +14514,7 @@
       </p:sp>
       <p:sp>
         <p:nvSpPr>
-          <p:cNvPr id="33" name="Text 31"/>
+          <p:cNvPr id="34" name="Text 31"/>
           <p:cNvSpPr txBox="1"/>
           <p:nvPr/>
         </p:nvSpPr>
@@ -14550,7 +14550,7 @@
       </p:sp>
       <p:sp>
         <p:nvSpPr>
-          <p:cNvPr id="34" name="Text 32"/>
+          <p:cNvPr id="35" name="Text 32"/>
           <p:cNvSpPr txBox="1"/>
           <p:nvPr/>
         </p:nvSpPr>
@@ -14586,7 +14586,7 @@
       </p:sp>
       <p:sp>
         <p:nvSpPr>
-          <p:cNvPr id="35" name="fp layer 5"/>
+          <p:cNvPr id="36" name="fp layer 5"/>
           <p:cNvSpPr/>
           <p:nvPr/>
         </p:nvSpPr>
@@ -14620,7 +14620,7 @@
       </p:sp>
       <p:sp>
         <p:nvSpPr>
-          <p:cNvPr id="36" name="fp num"/>
+          <p:cNvPr id="37" name="fp num"/>
           <p:cNvSpPr/>
           <p:nvPr/>
         </p:nvSpPr>
@@ -14645,7 +14645,7 @@
       </p:sp>
       <p:sp>
         <p:nvSpPr>
-          <p:cNvPr id="37" name="Text 35"/>
+          <p:cNvPr id="38" name="Text 35"/>
           <p:cNvSpPr txBox="1"/>
           <p:nvPr/>
         </p:nvSpPr>
@@ -14681,7 +14681,7 @@
       </p:sp>
       <p:sp>
         <p:nvSpPr>
-          <p:cNvPr id="38" name="Text 36"/>
+          <p:cNvPr id="39" name="Text 36"/>
           <p:cNvSpPr txBox="1"/>
           <p:nvPr/>
         </p:nvSpPr>
@@ -14717,7 +14717,7 @@
       </p:sp>
       <p:sp>
         <p:nvSpPr>
-          <p:cNvPr id="39" name="Text 37"/>
+          <p:cNvPr id="40" name="Text 37"/>
           <p:cNvSpPr txBox="1"/>
           <p:nvPr/>
         </p:nvSpPr>
@@ -14753,7 +14753,7 @@
       </p:sp>
       <p:sp>
         <p:nvSpPr>
-          <p:cNvPr id="40" name="Text 38"/>
+          <p:cNvPr id="41" name="Text 38"/>
           <p:cNvSpPr txBox="1"/>
           <p:nvPr/>
         </p:nvSpPr>
@@ -14789,7 +14789,7 @@
       </p:sp>
       <p:sp>
         <p:nvSpPr>
-          <p:cNvPr id="41" name="Text 39"/>
+          <p:cNvPr id="42" name="Text 39"/>
           <p:cNvSpPr txBox="1"/>
           <p:nvPr/>
         </p:nvSpPr>
@@ -14825,7 +14825,7 @@
       </p:sp>
       <p:sp>
         <p:nvSpPr>
-          <p:cNvPr id="42" name="acc strip"/>
+          <p:cNvPr id="43" name="acc strip"/>
           <p:cNvSpPr/>
           <p:nvPr/>
         </p:nvSpPr>
@@ -14852,7 +14852,7 @@
       </p:sp>
       <p:sp>
         <p:nvSpPr>
-          <p:cNvPr id="43" name="Text 41"/>
+          <p:cNvPr id="44" name="Text 41"/>
           <p:cNvSpPr txBox="1"/>
           <p:nvPr/>
         </p:nvSpPr>
@@ -14888,7 +14888,7 @@
       </p:sp>
       <p:sp>
         <p:nvSpPr>
-          <p:cNvPr id="44" name="refs"/>
+          <p:cNvPr id="45" name="refs"/>
           <p:cNvSpPr txBox="1"/>
           <p:nvPr/>
         </p:nvSpPr>
@@ -14924,7 +14924,7 @@
       </p:sp>
       <p:sp>
         <p:nvSpPr>
-          <p:cNvPr id="25" name="Slide Number Placeholder 0"/>
+          <p:cNvPr id="46" name="Slide Number Placeholder 0"/>
           <p:cNvSpPr>
             <a:spLocks noGrp="1"/>
           </p:cNvSpPr>
@@ -14980,7 +14980,7 @@
   <p:cSld name="Slide 18">
     <p:spTree>
       <p:nvGrpSpPr>
-        <p:cNvPr id="1" name=""/>
+        <p:cNvPr id="2" name=""/>
         <p:cNvGrpSpPr/>
         <p:nvPr/>
       </p:nvGrpSpPr>
@@ -14994,7 +14994,7 @@
       </p:grpSpPr>
       <p:sp>
         <p:nvSpPr>
-          <p:cNvPr id="2" name="Text 0"/>
+          <p:cNvPr id="3" name="Text 0"/>
           <p:cNvSpPr/>
           <p:nvPr>
             <p:ph idx="100" type="title" hasCustomPrompt="1"/>
@@ -15032,7 +15032,7 @@
       </p:sp>
       <p:sp>
         <p:nvSpPr>
-          <p:cNvPr id="3" name="subtitle"/>
+          <p:cNvPr id="4" name="subtitle"/>
           <p:cNvSpPr txBox="1"/>
           <p:nvPr/>
         </p:nvSpPr>
@@ -15068,7 +15068,7 @@
       </p:sp>
       <p:pic>
         <p:nvPicPr>
-          <p:cNvPr id="4" name="SAM 2 마스크 투표" descr="/tmp/claude-0/-home-user-hsr1m/6022f0b4-b8f8-52b0-8810-837ebd6bfbe9/scratchpad/deck/img/fig_13_0007_조밀_큰상자_마스크.jpg">    </p:cNvPr>
+          <p:cNvPr id="5" name="SAM 2 마스크 투표" descr="/tmp/claude-0/-home-user-hsr1m/6022f0b4-b8f8-52b0-8810-837ebd6bfbe9/scratchpad/deck/img/fig_13_0007_조밀_큰상자_마스크.jpg">    </p:cNvPr>
           <p:cNvPicPr>
             <a:picLocks noChangeAspect="1"/>
           </p:cNvPicPr>
@@ -15091,7 +15091,7 @@
       </p:pic>
       <p:sp>
         <p:nvSpPr>
-          <p:cNvPr id="5" name="Text 2"/>
+          <p:cNvPr id="6" name="Text 2"/>
           <p:cNvSpPr txBox="1"/>
           <p:nvPr/>
         </p:nvSpPr>
@@ -15127,7 +15127,7 @@
       </p:sp>
       <p:sp>
         <p:nvSpPr>
-          <p:cNvPr id="6" name="Text 3"/>
+          <p:cNvPr id="7" name="Text 3"/>
           <p:cNvSpPr txBox="1"/>
           <p:nvPr/>
         </p:nvSpPr>
@@ -15163,7 +15163,7 @@
       </p:sp>
       <p:sp>
         <p:nvSpPr>
-          <p:cNvPr id="7" name="Text 4"/>
+          <p:cNvPr id="8" name="Text 4"/>
           <p:cNvSpPr txBox="1"/>
           <p:nvPr/>
         </p:nvSpPr>
@@ -15199,7 +15199,7 @@
       </p:sp>
       <p:sp>
         <p:nvSpPr>
-          <p:cNvPr id="8" name="Text 5"/>
+          <p:cNvPr id="9" name="Text 5"/>
           <p:cNvSpPr txBox="1"/>
           <p:nvPr/>
         </p:nvSpPr>
@@ -15235,7 +15235,7 @@
       </p:sp>
       <p:sp>
         <p:nvSpPr>
-          <p:cNvPr id="9" name="Text 6"/>
+          <p:cNvPr id="10" name="Text 6"/>
           <p:cNvSpPr txBox="1"/>
           <p:nvPr/>
         </p:nvSpPr>
@@ -15271,7 +15271,7 @@
       </p:sp>
       <p:sp>
         <p:nvSpPr>
-          <p:cNvPr id="10" name="Text 7"/>
+          <p:cNvPr id="11" name="Text 7"/>
           <p:cNvSpPr txBox="1"/>
           <p:nvPr/>
         </p:nvSpPr>
@@ -15307,7 +15307,7 @@
       </p:sp>
       <p:sp>
         <p:nvSpPr>
-          <p:cNvPr id="11" name="Text 8"/>
+          <p:cNvPr id="12" name="Text 8"/>
           <p:cNvSpPr txBox="1"/>
           <p:nvPr/>
         </p:nvSpPr>
@@ -15343,7 +15343,7 @@
       </p:sp>
       <p:sp>
         <p:nvSpPr>
-          <p:cNvPr id="12" name="Text 9"/>
+          <p:cNvPr id="13" name="Text 9"/>
           <p:cNvSpPr txBox="1"/>
           <p:nvPr/>
         </p:nvSpPr>
@@ -15379,7 +15379,7 @@
       </p:sp>
       <p:sp>
         <p:nvSpPr>
-          <p:cNvPr id="13" name="Text 10"/>
+          <p:cNvPr id="14" name="Text 10"/>
           <p:cNvSpPr txBox="1"/>
           <p:nvPr/>
         </p:nvSpPr>
@@ -15415,7 +15415,7 @@
       </p:sp>
       <p:sp>
         <p:nvSpPr>
-          <p:cNvPr id="14" name="Text 11"/>
+          <p:cNvPr id="15" name="Text 11"/>
           <p:cNvSpPr txBox="1"/>
           <p:nvPr/>
         </p:nvSpPr>
@@ -15451,7 +15451,7 @@
       </p:sp>
       <p:sp>
         <p:nvSpPr>
-          <p:cNvPr id="15" name="Text 12"/>
+          <p:cNvPr id="16" name="Text 12"/>
           <p:cNvSpPr txBox="1"/>
           <p:nvPr/>
         </p:nvSpPr>
@@ -15487,7 +15487,7 @@
       </p:sp>
       <p:sp>
         <p:nvSpPr>
-          <p:cNvPr id="16" name="Text 13"/>
+          <p:cNvPr id="17" name="Text 13"/>
           <p:cNvSpPr txBox="1"/>
           <p:nvPr/>
         </p:nvSpPr>
@@ -15523,7 +15523,7 @@
       </p:sp>
       <p:sp>
         <p:nvSpPr>
-          <p:cNvPr id="17" name="Text 14"/>
+          <p:cNvPr id="18" name="Text 14"/>
           <p:cNvSpPr txBox="1"/>
           <p:nvPr/>
         </p:nvSpPr>
@@ -15559,7 +15559,7 @@
       </p:sp>
       <p:sp>
         <p:nvSpPr>
-          <p:cNvPr id="18" name="card 무게 = 부피 × 겉보기밀도 → 구간"/>
+          <p:cNvPr id="19" name="card 무게 = 부피 × 겉보기밀도 → 구간"/>
           <p:cNvSpPr/>
           <p:nvPr/>
         </p:nvSpPr>
@@ -15593,7 +15593,7 @@
       </p:sp>
       <p:sp>
         <p:nvSpPr>
-          <p:cNvPr id="19" name="icon circle"/>
+          <p:cNvPr id="20" name="icon circle"/>
           <p:cNvSpPr/>
           <p:nvPr/>
         </p:nvSpPr>
@@ -15618,7 +15618,7 @@
       </p:sp>
       <p:pic>
         <p:nvPicPr>
-          <p:cNvPr id="20" name="icon FaRulerCombined" descr="preencoded.png">    </p:cNvPr>
+          <p:cNvPr id="21" name="icon FaRulerCombined" descr="preencoded.png">    </p:cNvPr>
           <p:cNvPicPr>
             <a:picLocks noChangeAspect="1"/>
           </p:cNvPicPr>
@@ -15642,7 +15642,7 @@
       </p:pic>
       <p:sp>
         <p:nvSpPr>
-          <p:cNvPr id="21" name="Text 17"/>
+          <p:cNvPr id="22" name="Text 17"/>
           <p:cNvSpPr txBox="1"/>
           <p:nvPr/>
         </p:nvSpPr>
@@ -15678,7 +15678,7 @@
       </p:sp>
       <p:sp>
         <p:nvSpPr>
-          <p:cNvPr id="22" name="Text 18"/>
+          <p:cNvPr id="23" name="Text 18"/>
           <p:cNvSpPr txBox="1"/>
           <p:nvPr/>
         </p:nvSpPr>
@@ -15717,7 +15717,7 @@
       </p:sp>
       <p:sp>
         <p:nvSpPr>
-          <p:cNvPr id="23" name="card 구간이 있어야 '다시 갈 곳'이 정해진다"/>
+          <p:cNvPr id="24" name="card 구간이 있어야 '다시 갈 곳'이 정해진다"/>
           <p:cNvSpPr/>
           <p:nvPr/>
         </p:nvSpPr>
@@ -15751,7 +15751,7 @@
       </p:sp>
       <p:sp>
         <p:nvSpPr>
-          <p:cNvPr id="24" name="icon circle"/>
+          <p:cNvPr id="25" name="icon circle"/>
           <p:cNvSpPr/>
           <p:nvPr/>
         </p:nvSpPr>
@@ -15776,7 +15776,7 @@
       </p:sp>
       <p:pic>
         <p:nvPicPr>
-          <p:cNvPr id="25" name="icon FaBullseye" descr="preencoded.png">    </p:cNvPr>
+          <p:cNvPr id="26" name="icon FaBullseye" descr="preencoded.png">    </p:cNvPr>
           <p:cNvPicPr>
             <a:picLocks noChangeAspect="1"/>
           </p:cNvPicPr>
@@ -15800,7 +15800,7 @@
       </p:pic>
       <p:sp>
         <p:nvSpPr>
-          <p:cNvPr id="26" name="Text 21"/>
+          <p:cNvPr id="27" name="Text 21"/>
           <p:cNvSpPr txBox="1"/>
           <p:nvPr/>
         </p:nvSpPr>
@@ -15836,7 +15836,7 @@
       </p:sp>
       <p:sp>
         <p:nvSpPr>
-          <p:cNvPr id="27" name="Text 22"/>
+          <p:cNvPr id="28" name="Text 22"/>
           <p:cNvSpPr txBox="1"/>
           <p:nvPr/>
         </p:nvSpPr>
@@ -15875,7 +15875,7 @@
       </p:sp>
       <p:sp>
         <p:nvSpPr>
-          <p:cNvPr id="28" name="refs"/>
+          <p:cNvPr id="29" name="refs"/>
           <p:cNvSpPr txBox="1"/>
           <p:nvPr/>
         </p:nvSpPr>
@@ -15911,7 +15911,7 @@
       </p:sp>
       <p:sp>
         <p:nvSpPr>
-          <p:cNvPr id="25" name="Slide Number Placeholder 0"/>
+          <p:cNvPr id="30" name="Slide Number Placeholder 0"/>
           <p:cNvSpPr>
             <a:spLocks noGrp="1"/>
           </p:cNvSpPr>
@@ -17602,7 +17602,7 @@
   <p:cSld name="Slide 21">
     <p:spTree>
       <p:nvGrpSpPr>
-        <p:cNvPr id="1" name=""/>
+        <p:cNvPr id="2" name=""/>
         <p:cNvGrpSpPr/>
         <p:nvPr/>
       </p:nvGrpSpPr>
@@ -17616,7 +17616,7 @@
       </p:grpSpPr>
       <p:sp>
         <p:nvSpPr>
-          <p:cNvPr id="2" name="Text 0"/>
+          <p:cNvPr id="3" name="Text 0"/>
           <p:cNvSpPr/>
           <p:nvPr>
             <p:ph idx="100" type="title" hasCustomPrompt="1"/>
@@ -17654,7 +17654,7 @@
       </p:sp>
       <p:sp>
         <p:nvSpPr>
-          <p:cNvPr id="3" name="subtitle"/>
+          <p:cNvPr id="4" name="subtitle"/>
           <p:cNvSpPr txBox="1"/>
           <p:nvPr/>
         </p:nvSpPr>
@@ -17690,7 +17690,7 @@
       </p:sp>
       <p:sp>
         <p:nvSpPr>
-          <p:cNvPr id="4" name="step 어디를 날지"/>
+          <p:cNvPr id="5" name="step 어디를 날지"/>
           <p:cNvSpPr/>
           <p:nvPr/>
         </p:nvSpPr>
@@ -17717,7 +17717,7 @@
       </p:sp>
       <p:sp>
         <p:nvSpPr>
-          <p:cNvPr id="5" name="icon circle"/>
+          <p:cNvPr id="6" name="icon circle"/>
           <p:cNvSpPr/>
           <p:nvPr/>
         </p:nvSpPr>
@@ -17742,7 +17742,7 @@
       </p:sp>
       <p:pic>
         <p:nvPicPr>
-          <p:cNvPr id="6" name="icon FaSatellite" descr="preencoded.png">    </p:cNvPr>
+          <p:cNvPr id="7" name="icon FaSatellite" descr="preencoded.png">    </p:cNvPr>
           <p:cNvPicPr>
             <a:picLocks noChangeAspect="1"/>
           </p:cNvPicPr>
@@ -17766,7 +17766,7 @@
       </p:pic>
       <p:sp>
         <p:nvSpPr>
-          <p:cNvPr id="7" name="Text 4"/>
+          <p:cNvPr id="8" name="Text 4"/>
           <p:cNvSpPr txBox="1"/>
           <p:nvPr/>
         </p:nvSpPr>
@@ -17802,7 +17802,7 @@
       </p:sp>
       <p:sp>
         <p:nvSpPr>
-          <p:cNvPr id="8" name="Text 5"/>
+          <p:cNvPr id="9" name="Text 5"/>
           <p:cNvSpPr txBox="1"/>
           <p:nvPr/>
         </p:nvSpPr>
@@ -17866,7 +17866,7 @@
       </p:sp>
       <p:sp>
         <p:nvSpPr>
-          <p:cNvPr id="9" name="step 비행"/>
+          <p:cNvPr id="10" name="step 비행"/>
           <p:cNvSpPr/>
           <p:nvPr/>
         </p:nvSpPr>
@@ -17893,7 +17893,7 @@
       </p:sp>
       <p:sp>
         <p:nvSpPr>
-          <p:cNvPr id="10" name="icon circle"/>
+          <p:cNvPr id="11" name="icon circle"/>
           <p:cNvSpPr/>
           <p:nvPr/>
         </p:nvSpPr>
@@ -17918,7 +17918,7 @@
       </p:sp>
       <p:pic>
         <p:nvPicPr>
-          <p:cNvPr id="11" name="icon FaPlane" descr="preencoded.png">    </p:cNvPr>
+          <p:cNvPr id="12" name="icon FaPlane" descr="preencoded.png">    </p:cNvPr>
           <p:cNvPicPr>
             <a:picLocks noChangeAspect="1"/>
           </p:cNvPicPr>
@@ -17942,7 +17942,7 @@
       </p:pic>
       <p:sp>
         <p:nvSpPr>
-          <p:cNvPr id="12" name="Text 8"/>
+          <p:cNvPr id="13" name="Text 8"/>
           <p:cNvSpPr txBox="1"/>
           <p:nvPr/>
         </p:nvSpPr>
@@ -17978,7 +17978,7 @@
       </p:sp>
       <p:sp>
         <p:nvSpPr>
-          <p:cNvPr id="13" name="Text 9"/>
+          <p:cNvPr id="14" name="Text 9"/>
           <p:cNvSpPr txBox="1"/>
           <p:nvPr/>
         </p:nvSpPr>
@@ -18042,7 +18042,7 @@
       </p:sp>
       <p:sp>
         <p:nvSpPr>
-          <p:cNvPr id="14" name="step 탐지"/>
+          <p:cNvPr id="15" name="step 탐지"/>
           <p:cNvSpPr/>
           <p:nvPr/>
         </p:nvSpPr>
@@ -18069,7 +18069,7 @@
       </p:sp>
       <p:sp>
         <p:nvSpPr>
-          <p:cNvPr id="15" name="icon circle"/>
+          <p:cNvPr id="16" name="icon circle"/>
           <p:cNvSpPr/>
           <p:nvPr/>
         </p:nvSpPr>
@@ -18094,7 +18094,7 @@
       </p:sp>
       <p:pic>
         <p:nvPicPr>
-          <p:cNvPr id="16" name="icon FaSearchLocation" descr="preencoded.png">    </p:cNvPr>
+          <p:cNvPr id="17" name="icon FaSearchLocation" descr="preencoded.png">    </p:cNvPr>
           <p:cNvPicPr>
             <a:picLocks noChangeAspect="1"/>
           </p:cNvPicPr>
@@ -18118,7 +18118,7 @@
       </p:pic>
       <p:sp>
         <p:nvSpPr>
-          <p:cNvPr id="17" name="Text 12"/>
+          <p:cNvPr id="18" name="Text 12"/>
           <p:cNvSpPr txBox="1"/>
           <p:nvPr/>
         </p:nvSpPr>
@@ -18154,7 +18154,7 @@
       </p:sp>
       <p:sp>
         <p:nvSpPr>
-          <p:cNvPr id="18" name="Text 13"/>
+          <p:cNvPr id="19" name="Text 13"/>
           <p:cNvSpPr txBox="1"/>
           <p:nvPr/>
         </p:nvSpPr>
@@ -18218,7 +18218,7 @@
       </p:sp>
       <p:sp>
         <p:nvSpPr>
-          <p:cNvPr id="19" name="step 위치"/>
+          <p:cNvPr id="20" name="step 위치"/>
           <p:cNvSpPr/>
           <p:nvPr/>
         </p:nvSpPr>
@@ -18245,7 +18245,7 @@
       </p:sp>
       <p:sp>
         <p:nvSpPr>
-          <p:cNvPr id="20" name="icon circle"/>
+          <p:cNvPr id="21" name="icon circle"/>
           <p:cNvSpPr/>
           <p:nvPr/>
         </p:nvSpPr>
@@ -18270,7 +18270,7 @@
       </p:sp>
       <p:pic>
         <p:nvPicPr>
-          <p:cNvPr id="21" name="icon FaCrosshairs" descr="preencoded.png">    </p:cNvPr>
+          <p:cNvPr id="22" name="icon FaCrosshairs" descr="preencoded.png">    </p:cNvPr>
           <p:cNvPicPr>
             <a:picLocks noChangeAspect="1"/>
           </p:cNvPicPr>
@@ -18294,7 +18294,7 @@
       </p:pic>
       <p:sp>
         <p:nvSpPr>
-          <p:cNvPr id="22" name="Text 16"/>
+          <p:cNvPr id="23" name="Text 16"/>
           <p:cNvSpPr txBox="1"/>
           <p:nvPr/>
         </p:nvSpPr>
@@ -18330,7 +18330,7 @@
       </p:sp>
       <p:sp>
         <p:nvSpPr>
-          <p:cNvPr id="23" name="Text 17"/>
+          <p:cNvPr id="24" name="Text 17"/>
           <p:cNvSpPr txBox="1"/>
           <p:nvPr/>
         </p:nvSpPr>
@@ -18394,7 +18394,7 @@
       </p:sp>
       <p:sp>
         <p:nvSpPr>
-          <p:cNvPr id="24" name="step 부피"/>
+          <p:cNvPr id="25" name="step 부피"/>
           <p:cNvSpPr/>
           <p:nvPr/>
         </p:nvSpPr>
@@ -18421,7 +18421,7 @@
       </p:sp>
       <p:sp>
         <p:nvSpPr>
-          <p:cNvPr id="25" name="icon circle"/>
+          <p:cNvPr id="26" name="icon circle"/>
           <p:cNvSpPr/>
           <p:nvPr/>
         </p:nvSpPr>
@@ -18446,7 +18446,7 @@
       </p:sp>
       <p:pic>
         <p:nvPicPr>
-          <p:cNvPr id="26" name="icon FaCubes" descr="preencoded.png">    </p:cNvPr>
+          <p:cNvPr id="27" name="icon FaCubes" descr="preencoded.png">    </p:cNvPr>
           <p:cNvPicPr>
             <a:picLocks noChangeAspect="1"/>
           </p:cNvPicPr>
@@ -18470,7 +18470,7 @@
       </p:pic>
       <p:sp>
         <p:nvSpPr>
-          <p:cNvPr id="27" name="Text 20"/>
+          <p:cNvPr id="28" name="Text 20"/>
           <p:cNvSpPr txBox="1"/>
           <p:nvPr/>
         </p:nvSpPr>
@@ -18506,7 +18506,7 @@
       </p:sp>
       <p:sp>
         <p:nvSpPr>
-          <p:cNvPr id="28" name="Text 21"/>
+          <p:cNvPr id="29" name="Text 21"/>
           <p:cNvSpPr txBox="1"/>
           <p:nvPr/>
         </p:nvSpPr>
@@ -18570,7 +18570,7 @@
       </p:sp>
       <p:sp>
         <p:nvSpPr>
-          <p:cNvPr id="29" name="step 무게 구간"/>
+          <p:cNvPr id="30" name="step 무게 구간"/>
           <p:cNvSpPr/>
           <p:nvPr/>
         </p:nvSpPr>
@@ -18597,7 +18597,7 @@
       </p:sp>
       <p:sp>
         <p:nvSpPr>
-          <p:cNvPr id="30" name="icon circle"/>
+          <p:cNvPr id="31" name="icon circle"/>
           <p:cNvSpPr/>
           <p:nvPr/>
         </p:nvSpPr>
@@ -18622,7 +18622,7 @@
       </p:sp>
       <p:pic>
         <p:nvPicPr>
-          <p:cNvPr id="31" name="icon FaRulerCombined" descr="preencoded.png">    </p:cNvPr>
+          <p:cNvPr id="32" name="icon FaRulerCombined" descr="preencoded.png">    </p:cNvPr>
           <p:cNvPicPr>
             <a:picLocks noChangeAspect="1"/>
           </p:cNvPicPr>
@@ -18646,7 +18646,7 @@
       </p:pic>
       <p:sp>
         <p:nvSpPr>
-          <p:cNvPr id="32" name="Text 24"/>
+          <p:cNvPr id="33" name="Text 24"/>
           <p:cNvSpPr txBox="1"/>
           <p:nvPr/>
         </p:nvSpPr>
@@ -18682,7 +18682,7 @@
       </p:sp>
       <p:sp>
         <p:nvSpPr>
-          <p:cNvPr id="33" name="Text 25"/>
+          <p:cNvPr id="34" name="Text 25"/>
           <p:cNvSpPr txBox="1"/>
           <p:nvPr/>
         </p:nvSpPr>
@@ -18746,7 +18746,7 @@
       </p:sp>
       <p:sp>
         <p:nvSpPr>
-          <p:cNvPr id="34" name="step 수거계획"/>
+          <p:cNvPr id="35" name="step 수거계획"/>
           <p:cNvSpPr/>
           <p:nvPr/>
         </p:nvSpPr>
@@ -18773,7 +18773,7 @@
       </p:sp>
       <p:sp>
         <p:nvSpPr>
-          <p:cNvPr id="35" name="icon circle"/>
+          <p:cNvPr id="36" name="icon circle"/>
           <p:cNvSpPr/>
           <p:nvPr/>
         </p:nvSpPr>
@@ -18798,7 +18798,7 @@
       </p:sp>
       <p:pic>
         <p:nvPicPr>
-          <p:cNvPr id="36" name="icon FaTruck" descr="preencoded.png">    </p:cNvPr>
+          <p:cNvPr id="37" name="icon FaTruck" descr="preencoded.png">    </p:cNvPr>
           <p:cNvPicPr>
             <a:picLocks noChangeAspect="1"/>
           </p:cNvPicPr>
@@ -18822,7 +18822,7 @@
       </p:pic>
       <p:sp>
         <p:nvSpPr>
-          <p:cNvPr id="37" name="Text 28"/>
+          <p:cNvPr id="38" name="Text 28"/>
           <p:cNvSpPr txBox="1"/>
           <p:nvPr/>
         </p:nvSpPr>
@@ -18858,7 +18858,7 @@
       </p:sp>
       <p:sp>
         <p:nvSpPr>
-          <p:cNvPr id="38" name="Text 29"/>
+          <p:cNvPr id="39" name="Text 29"/>
           <p:cNvSpPr txBox="1"/>
           <p:nvPr/>
         </p:nvSpPr>
@@ -18922,7 +18922,7 @@
       </p:sp>
       <p:sp>
         <p:nvSpPr>
-          <p:cNvPr id="39" name="check"/>
+          <p:cNvPr id="40" name="check"/>
           <p:cNvSpPr/>
           <p:nvPr/>
         </p:nvSpPr>
@@ -18947,7 +18947,7 @@
       </p:sp>
       <p:pic>
         <p:nvPicPr>
-          <p:cNvPr id="40" name="check icon" descr="preencoded.png">    </p:cNvPr>
+          <p:cNvPr id="41" name="check icon" descr="preencoded.png">    </p:cNvPr>
           <p:cNvPicPr>
             <a:picLocks noChangeAspect="1"/>
           </p:cNvPicPr>
@@ -18971,7 +18971,7 @@
       </p:pic>
       <p:sp>
         <p:nvSpPr>
-          <p:cNvPr id="41" name="check"/>
+          <p:cNvPr id="42" name="check"/>
           <p:cNvSpPr/>
           <p:nvPr/>
         </p:nvSpPr>
@@ -18996,7 +18996,7 @@
       </p:sp>
       <p:pic>
         <p:nvPicPr>
-          <p:cNvPr id="42" name="check icon" descr="preencoded.png">    </p:cNvPr>
+          <p:cNvPr id="43" name="check icon" descr="preencoded.png">    </p:cNvPr>
           <p:cNvPicPr>
             <a:picLocks noChangeAspect="1"/>
           </p:cNvPicPr>
@@ -19020,7 +19020,7 @@
       </p:pic>
       <p:sp>
         <p:nvSpPr>
-          <p:cNvPr id="43" name="check"/>
+          <p:cNvPr id="44" name="check"/>
           <p:cNvSpPr/>
           <p:nvPr/>
         </p:nvSpPr>
@@ -19045,7 +19045,7 @@
       </p:sp>
       <p:pic>
         <p:nvPicPr>
-          <p:cNvPr id="44" name="check icon" descr="preencoded.png">    </p:cNvPr>
+          <p:cNvPr id="45" name="check icon" descr="preencoded.png">    </p:cNvPr>
           <p:cNvPicPr>
             <a:picLocks noChangeAspect="1"/>
           </p:cNvPicPr>
@@ -19069,7 +19069,7 @@
       </p:pic>
       <p:sp>
         <p:nvSpPr>
-          <p:cNvPr id="45" name="check"/>
+          <p:cNvPr id="46" name="check"/>
           <p:cNvSpPr/>
           <p:nvPr/>
         </p:nvSpPr>
@@ -19094,7 +19094,7 @@
       </p:sp>
       <p:pic>
         <p:nvPicPr>
-          <p:cNvPr id="46" name="check icon" descr="preencoded.png">    </p:cNvPr>
+          <p:cNvPr id="47" name="check icon" descr="preencoded.png">    </p:cNvPr>
           <p:cNvPicPr>
             <a:picLocks noChangeAspect="1"/>
           </p:cNvPicPr>
@@ -19118,7 +19118,7 @@
       </p:pic>
       <p:sp>
         <p:nvSpPr>
-          <p:cNvPr id="47" name="check"/>
+          <p:cNvPr id="48" name="check"/>
           <p:cNvSpPr/>
           <p:nvPr/>
         </p:nvSpPr>
@@ -19143,7 +19143,7 @@
       </p:sp>
       <p:pic>
         <p:nvPicPr>
-          <p:cNvPr id="48" name="check icon" descr="preencoded.png">    </p:cNvPr>
+          <p:cNvPr id="49" name="check icon" descr="preencoded.png">    </p:cNvPr>
           <p:cNvPicPr>
             <a:picLocks noChangeAspect="1"/>
           </p:cNvPicPr>
@@ -19167,7 +19167,7 @@
       </p:pic>
       <p:sp>
         <p:nvSpPr>
-          <p:cNvPr id="49" name="check"/>
+          <p:cNvPr id="50" name="check"/>
           <p:cNvSpPr/>
           <p:nvPr/>
         </p:nvSpPr>
@@ -19192,7 +19192,7 @@
       </p:sp>
       <p:pic>
         <p:nvPicPr>
-          <p:cNvPr id="50" name="check icon" descr="preencoded.png">    </p:cNvPr>
+          <p:cNvPr id="51" name="check icon" descr="preencoded.png">    </p:cNvPr>
           <p:cNvPicPr>
             <a:picLocks noChangeAspect="1"/>
           </p:cNvPicPr>
@@ -19216,7 +19216,7 @@
       </p:pic>
       <p:sp>
         <p:nvSpPr>
-          <p:cNvPr id="51" name="check"/>
+          <p:cNvPr id="52" name="check"/>
           <p:cNvSpPr/>
           <p:nvPr/>
         </p:nvSpPr>
@@ -19241,7 +19241,7 @@
       </p:sp>
       <p:pic>
         <p:nvPicPr>
-          <p:cNvPr id="52" name="check icon" descr="preencoded.png">    </p:cNvPr>
+          <p:cNvPr id="53" name="check icon" descr="preencoded.png">    </p:cNvPr>
           <p:cNvPicPr>
             <a:picLocks noChangeAspect="1"/>
           </p:cNvPicPr>
@@ -19265,7 +19265,7 @@
       </p:pic>
       <p:sp>
         <p:nvSpPr>
-          <p:cNvPr id="53" name="stat 실제 데이터로 확인한 단계"/>
+          <p:cNvPr id="54" name="stat 실제 데이터로 확인한 단계"/>
           <p:cNvSpPr/>
           <p:nvPr/>
         </p:nvSpPr>
@@ -19299,7 +19299,7 @@
       </p:sp>
       <p:sp>
         <p:nvSpPr>
-          <p:cNvPr id="54" name="Text 38"/>
+          <p:cNvPr id="55" name="Text 38"/>
           <p:cNvSpPr txBox="1"/>
           <p:nvPr/>
         </p:nvSpPr>
@@ -19335,7 +19335,7 @@
       </p:sp>
       <p:sp>
         <p:nvSpPr>
-          <p:cNvPr id="55" name="Text 39"/>
+          <p:cNvPr id="56" name="Text 39"/>
           <p:cNvSpPr txBox="1"/>
           <p:nvPr/>
         </p:nvSpPr>
@@ -19382,7 +19382,7 @@
       </p:sp>
       <p:sp>
         <p:nvSpPr>
-          <p:cNvPr id="56" name="Text 40"/>
+          <p:cNvPr id="57" name="Text 40"/>
           <p:cNvSpPr txBox="1"/>
           <p:nvPr/>
         </p:nvSpPr>
@@ -19418,7 +19418,7 @@
       </p:sp>
       <p:sp>
         <p:nvSpPr>
-          <p:cNvPr id="57" name="stat 상자 · 영상 · 해안"/>
+          <p:cNvPr id="58" name="stat 상자 · 영상 · 해안"/>
           <p:cNvSpPr/>
           <p:nvPr/>
         </p:nvSpPr>
@@ -19452,7 +19452,7 @@
       </p:sp>
       <p:sp>
         <p:nvSpPr>
-          <p:cNvPr id="58" name="Text 42"/>
+          <p:cNvPr id="59" name="Text 42"/>
           <p:cNvSpPr txBox="1"/>
           <p:nvPr/>
         </p:nvSpPr>
@@ -19488,7 +19488,7 @@
       </p:sp>
       <p:sp>
         <p:nvSpPr>
-          <p:cNvPr id="59" name="Text 43"/>
+          <p:cNvPr id="60" name="Text 43"/>
           <p:cNvSpPr txBox="1"/>
           <p:nvPr/>
         </p:nvSpPr>
@@ -19527,7 +19527,7 @@
       </p:sp>
       <p:sp>
         <p:nvSpPr>
-          <p:cNvPr id="60" name="Text 44"/>
+          <p:cNvPr id="61" name="Text 44"/>
           <p:cNvSpPr txBox="1"/>
           <p:nvPr/>
         </p:nvSpPr>
@@ -19563,7 +19563,7 @@
       </p:sp>
       <p:sp>
         <p:nvSpPr>
-          <p:cNvPr id="61" name="stat 완료한 검증 실험"/>
+          <p:cNvPr id="62" name="stat 완료한 검증 실험"/>
           <p:cNvSpPr/>
           <p:nvPr/>
         </p:nvSpPr>
@@ -19597,7 +19597,7 @@
       </p:sp>
       <p:sp>
         <p:nvSpPr>
-          <p:cNvPr id="62" name="Text 46"/>
+          <p:cNvPr id="63" name="Text 46"/>
           <p:cNvSpPr txBox="1"/>
           <p:nvPr/>
         </p:nvSpPr>
@@ -19633,7 +19633,7 @@
       </p:sp>
       <p:sp>
         <p:nvSpPr>
-          <p:cNvPr id="63" name="Text 47"/>
+          <p:cNvPr id="64" name="Text 47"/>
           <p:cNvSpPr txBox="1"/>
           <p:nvPr/>
         </p:nvSpPr>
@@ -19680,7 +19680,7 @@
       </p:sp>
       <p:sp>
         <p:nvSpPr>
-          <p:cNvPr id="64" name="Text 48"/>
+          <p:cNvPr id="65" name="Text 48"/>
           <p:cNvSpPr txBox="1"/>
           <p:nvPr/>
         </p:nvSpPr>
@@ -19716,7 +19716,7 @@
       </p:sp>
       <p:sp>
         <p:nvSpPr>
-          <p:cNvPr id="65" name="stat 같은 자원으로 찾는 양"/>
+          <p:cNvPr id="66" name="stat 같은 자원으로 찾는 양"/>
           <p:cNvSpPr/>
           <p:nvPr/>
         </p:nvSpPr>
@@ -19750,7 +19750,7 @@
       </p:sp>
       <p:sp>
         <p:nvSpPr>
-          <p:cNvPr id="66" name="Text 50"/>
+          <p:cNvPr id="67" name="Text 50"/>
           <p:cNvSpPr txBox="1"/>
           <p:nvPr/>
         </p:nvSpPr>
@@ -19786,7 +19786,7 @@
       </p:sp>
       <p:sp>
         <p:nvSpPr>
-          <p:cNvPr id="67" name="Text 51"/>
+          <p:cNvPr id="68" name="Text 51"/>
           <p:cNvSpPr txBox="1"/>
           <p:nvPr/>
         </p:nvSpPr>
@@ -19825,7 +19825,7 @@
       </p:sp>
       <p:sp>
         <p:nvSpPr>
-          <p:cNvPr id="68" name="Text 52"/>
+          <p:cNvPr id="69" name="Text 52"/>
           <p:cNvSpPr txBox="1"/>
           <p:nvPr/>
         </p:nvSpPr>
@@ -19861,7 +19861,7 @@
       </p:sp>
       <p:sp>
         <p:nvSpPr>
-          <p:cNvPr id="25" name="Slide Number Placeholder 0"/>
+          <p:cNvPr id="70" name="Slide Number Placeholder 0"/>
           <p:cNvSpPr>
             <a:spLocks noGrp="1"/>
           </p:cNvSpPr>
@@ -20337,7 +20337,7 @@
   <p:cSld name="Slide 23">
     <p:spTree>
       <p:nvGrpSpPr>
-        <p:cNvPr id="1" name=""/>
+        <p:cNvPr id="2" name=""/>
         <p:cNvGrpSpPr/>
         <p:nvPr/>
       </p:nvGrpSpPr>
@@ -20351,7 +20351,7 @@
       </p:grpSpPr>
       <p:sp>
         <p:nvSpPr>
-          <p:cNvPr id="2" name="Text 0"/>
+          <p:cNvPr id="3" name="Text 0"/>
           <p:cNvSpPr/>
           <p:nvPr>
             <p:ph idx="100" type="title" hasCustomPrompt="1"/>
@@ -20389,7 +20389,7 @@
       </p:sp>
       <p:sp>
         <p:nvSpPr>
-          <p:cNvPr id="3" name="subtitle"/>
+          <p:cNvPr id="4" name="subtitle"/>
           <p:cNvSpPr txBox="1"/>
           <p:nvPr/>
         </p:nvSpPr>
@@ -20425,7 +20425,7 @@
       </p:sp>
       <p:pic>
         <p:nvPicPr>
-          <p:cNvPr id="4" name="니하우 시간 대비 포착" descr="/tmp/claude-0/-home-user-hsr1m/6022f0b4-b8f8-52b0-8810-837ebd6bfbe9/scratchpad/deck/img/fig_22_시간대비포착_핫스팟_vs_지그재그.jpg">    </p:cNvPr>
+          <p:cNvPr id="5" name="니하우 시간 대비 포착" descr="/tmp/claude-0/-home-user-hsr1m/6022f0b4-b8f8-52b0-8810-837ebd6bfbe9/scratchpad/deck/img/fig_22_시간대비포착_핫스팟_vs_지그재그.jpg">    </p:cNvPr>
           <p:cNvPicPr>
             <a:picLocks noChangeAspect="1"/>
           </p:cNvPicPr>
@@ -20448,7 +20448,7 @@
       </p:pic>
       <p:sp>
         <p:nvSpPr>
-          <p:cNvPr id="5" name="Text 2"/>
+          <p:cNvPr id="6" name="Text 2"/>
           <p:cNvSpPr txBox="1"/>
           <p:nvPr/>
         </p:nvSpPr>
@@ -20484,7 +20484,7 @@
       </p:sp>
       <p:sp>
         <p:nvSpPr>
-          <p:cNvPr id="6" name="stat 니하우: 상위 30% 길이가 잡는 무게"/>
+          <p:cNvPr id="7" name="stat 니하우: 상위 30% 길이가 잡는 무게"/>
           <p:cNvSpPr/>
           <p:nvPr/>
         </p:nvSpPr>
@@ -20518,7 +20518,7 @@
       </p:sp>
       <p:sp>
         <p:nvSpPr>
-          <p:cNvPr id="7" name="Text 4"/>
+          <p:cNvPr id="8" name="Text 4"/>
           <p:cNvSpPr txBox="1"/>
           <p:nvPr/>
         </p:nvSpPr>
@@ -20554,7 +20554,7 @@
       </p:sp>
       <p:sp>
         <p:nvSpPr>
-          <p:cNvPr id="8" name="Text 5"/>
+          <p:cNvPr id="9" name="Text 5"/>
           <p:cNvSpPr txBox="1"/>
           <p:nvPr/>
         </p:nvSpPr>
@@ -20601,7 +20601,7 @@
       </p:sp>
       <p:sp>
         <p:nvSpPr>
-          <p:cNvPr id="9" name="Text 6"/>
+          <p:cNvPr id="10" name="Text 6"/>
           <p:cNvSpPr txBox="1"/>
           <p:nvPr/>
         </p:nvSpPr>
@@ -20637,7 +20637,7 @@
       </p:sp>
       <p:sp>
         <p:nvSpPr>
-          <p:cNvPr id="10" name="stat 문갑도: 라벨 42개 중 상위 30% 안"/>
+          <p:cNvPr id="11" name="stat 문갑도: 라벨 42개 중 상위 30% 안"/>
           <p:cNvSpPr/>
           <p:nvPr/>
         </p:nvSpPr>
@@ -20671,7 +20671,7 @@
       </p:sp>
       <p:sp>
         <p:nvSpPr>
-          <p:cNvPr id="11" name="Text 8"/>
+          <p:cNvPr id="12" name="Text 8"/>
           <p:cNvSpPr txBox="1"/>
           <p:nvPr/>
         </p:nvSpPr>
@@ -20707,7 +20707,7 @@
       </p:sp>
       <p:sp>
         <p:nvSpPr>
-          <p:cNvPr id="12" name="Text 9"/>
+          <p:cNvPr id="13" name="Text 9"/>
           <p:cNvSpPr txBox="1"/>
           <p:nvPr/>
         </p:nvSpPr>
@@ -20754,7 +20754,7 @@
       </p:sp>
       <p:sp>
         <p:nvSpPr>
-          <p:cNvPr id="13" name="Text 10"/>
+          <p:cNvPr id="14" name="Text 10"/>
           <p:cNvSpPr txBox="1"/>
           <p:nvPr/>
         </p:nvSpPr>
@@ -20790,7 +20790,7 @@
       </p:sp>
       <p:sp>
         <p:nvSpPr>
-          <p:cNvPr id="14" name="stat 인천 하구: 조석 모델 집적 해안"/>
+          <p:cNvPr id="15" name="stat 인천 하구: 조석 모델 집적 해안"/>
           <p:cNvSpPr/>
           <p:nvPr/>
         </p:nvSpPr>
@@ -20824,7 +20824,7 @@
       </p:sp>
       <p:sp>
         <p:nvSpPr>
-          <p:cNvPr id="15" name="Text 12"/>
+          <p:cNvPr id="16" name="Text 12"/>
           <p:cNvSpPr txBox="1"/>
           <p:nvPr/>
         </p:nvSpPr>
@@ -20860,7 +20860,7 @@
       </p:sp>
       <p:sp>
         <p:nvSpPr>
-          <p:cNvPr id="16" name="Text 13"/>
+          <p:cNvPr id="17" name="Text 13"/>
           <p:cNvSpPr txBox="1"/>
           <p:nvPr/>
         </p:nvSpPr>
@@ -20907,7 +20907,7 @@
       </p:sp>
       <p:sp>
         <p:nvSpPr>
-          <p:cNvPr id="17" name="Text 14"/>
+          <p:cNvPr id="18" name="Text 14"/>
           <p:cNvSpPr txBox="1"/>
           <p:nvPr/>
         </p:nvSpPr>
@@ -20943,7 +20943,7 @@
       </p:sp>
       <p:sp>
         <p:nvSpPr>
-          <p:cNvPr id="18" name="stat 다시 쌓인다: 앞/뒤 기간 순위상관"/>
+          <p:cNvPr id="19" name="stat 다시 쌓인다: 앞/뒤 기간 순위상관"/>
           <p:cNvSpPr/>
           <p:nvPr/>
         </p:nvSpPr>
@@ -20977,7 +20977,7 @@
       </p:sp>
       <p:sp>
         <p:nvSpPr>
-          <p:cNvPr id="19" name="Text 16"/>
+          <p:cNvPr id="20" name="Text 16"/>
           <p:cNvSpPr txBox="1"/>
           <p:nvPr/>
         </p:nvSpPr>
@@ -21013,7 +21013,7 @@
       </p:sp>
       <p:sp>
         <p:nvSpPr>
-          <p:cNvPr id="20" name="Text 17"/>
+          <p:cNvPr id="21" name="Text 17"/>
           <p:cNvSpPr txBox="1"/>
           <p:nvPr/>
         </p:nvSpPr>
@@ -21052,7 +21052,7 @@
       </p:sp>
       <p:sp>
         <p:nvSpPr>
-          <p:cNvPr id="21" name="Text 18"/>
+          <p:cNvPr id="22" name="Text 18"/>
           <p:cNvSpPr txBox="1"/>
           <p:nvPr/>
         </p:nvSpPr>
@@ -21088,7 +21088,7 @@
       </p:sp>
       <p:sp>
         <p:nvSpPr>
-          <p:cNvPr id="22" name="card 읽는 법"/>
+          <p:cNvPr id="23" name="card 읽는 법"/>
           <p:cNvSpPr/>
           <p:nvPr/>
         </p:nvSpPr>
@@ -21122,7 +21122,7 @@
       </p:sp>
       <p:sp>
         <p:nvSpPr>
-          <p:cNvPr id="23" name="Text 20"/>
+          <p:cNvPr id="24" name="Text 20"/>
           <p:cNvSpPr txBox="1"/>
           <p:nvPr/>
         </p:nvSpPr>
@@ -21158,7 +21158,7 @@
       </p:sp>
       <p:sp>
         <p:nvSpPr>
-          <p:cNvPr id="24" name="Text 21"/>
+          <p:cNvPr id="25" name="Text 21"/>
           <p:cNvSpPr txBox="1"/>
           <p:nvPr/>
         </p:nvSpPr>
@@ -21197,7 +21197,7 @@
       </p:sp>
       <p:sp>
         <p:nvSpPr>
-          <p:cNvPr id="25" name="refs"/>
+          <p:cNvPr id="26" name="refs"/>
           <p:cNvSpPr txBox="1"/>
           <p:nvPr/>
         </p:nvSpPr>
@@ -21233,7 +21233,7 @@
       </p:sp>
       <p:sp>
         <p:nvSpPr>
-          <p:cNvPr id="25" name="Slide Number Placeholder 0"/>
+          <p:cNvPr id="27" name="Slide Number Placeholder 0"/>
           <p:cNvSpPr>
             <a:spLocks noGrp="1"/>
           </p:cNvSpPr>
@@ -21289,7 +21289,7 @@
   <p:cSld name="Slide 24">
     <p:spTree>
       <p:nvGrpSpPr>
-        <p:cNvPr id="1" name=""/>
+        <p:cNvPr id="2" name=""/>
         <p:cNvGrpSpPr/>
         <p:nvPr/>
       </p:nvGrpSpPr>
@@ -21303,7 +21303,7 @@
       </p:grpSpPr>
       <p:sp>
         <p:nvSpPr>
-          <p:cNvPr id="2" name="Text 0"/>
+          <p:cNvPr id="3" name="Text 0"/>
           <p:cNvSpPr/>
           <p:nvPr>
             <p:ph idx="100" type="title" hasCustomPrompt="1"/>
@@ -21341,7 +21341,7 @@
       </p:sp>
       <p:sp>
         <p:nvSpPr>
-          <p:cNvPr id="3" name="subtitle"/>
+          <p:cNvPr id="4" name="subtitle"/>
           <p:cNvSpPr txBox="1"/>
           <p:nvPr/>
         </p:nvSpPr>
@@ -21377,7 +21377,7 @@
       </p:sp>
       <p:sp>
         <p:nvSpPr>
-          <p:cNvPr id="4" name="chart card"/>
+          <p:cNvPr id="5" name="chart card"/>
           <p:cNvSpPr/>
           <p:nvPr/>
         </p:nvSpPr>
@@ -21411,7 +21411,7 @@
       </p:sp>
       <p:sp>
         <p:nvSpPr>
-          <p:cNvPr id="5" name="Text 3"/>
+          <p:cNvPr id="6" name="Text 3"/>
           <p:cNvSpPr txBox="1"/>
           <p:nvPr/>
         </p:nvSpPr>
@@ -21447,7 +21447,7 @@
       </p:sp>
       <p:graphicFrame>
         <p:nvGraphicFramePr>
-          <p:cNvPr id="6" name="Chart 0" descr=""/>
+          <p:cNvPr id="7" name="Chart 0" descr=""/>
           <p:cNvGraphicFramePr/>
           <p:nvPr/>
         </p:nvGraphicFramePr>
@@ -21463,7 +21463,7 @@
       </p:graphicFrame>
       <p:sp>
         <p:nvSpPr>
-          <p:cNvPr id="7" name="card 무엇이 올렸나"/>
+          <p:cNvPr id="8" name="card 무엇이 올렸나"/>
           <p:cNvSpPr/>
           <p:nvPr/>
         </p:nvSpPr>
@@ -21497,7 +21497,7 @@
       </p:sp>
       <p:sp>
         <p:nvSpPr>
-          <p:cNvPr id="8" name="Text 5"/>
+          <p:cNvPr id="9" name="Text 5"/>
           <p:cNvSpPr txBox="1"/>
           <p:nvPr/>
         </p:nvSpPr>
@@ -21533,7 +21533,7 @@
       </p:sp>
       <p:sp>
         <p:nvSpPr>
-          <p:cNvPr id="9" name="Text 6"/>
+          <p:cNvPr id="10" name="Text 6"/>
           <p:cNvSpPr txBox="1"/>
           <p:nvPr/>
         </p:nvSpPr>
@@ -21572,7 +21572,7 @@
       </p:sp>
       <p:pic>
         <p:nvPicPr>
-          <p:cNvPr id="10" name="0015 야간 상자 30개 지도" descr="/tmp/claude-0/-home-user-hsr1m/6022f0b4-b8f8-52b0-8810-837ebd6bfbe9/scratchpad/deck/img/fig_16_0015_야간_상자30개_지도.jpg">    </p:cNvPr>
+          <p:cNvPr id="11" name="0015 야간 상자 30개 지도" descr="/tmp/claude-0/-home-user-hsr1m/6022f0b4-b8f8-52b0-8810-837ebd6bfbe9/scratchpad/deck/img/fig_16_0015_야간_상자30개_지도.jpg">    </p:cNvPr>
           <p:cNvPicPr>
             <a:picLocks noChangeAspect="1"/>
           </p:cNvPicPr>
@@ -21595,7 +21595,7 @@
       </p:pic>
       <p:sp>
         <p:nvSpPr>
-          <p:cNvPr id="11" name="Text 7"/>
+          <p:cNvPr id="12" name="Text 7"/>
           <p:cNvSpPr txBox="1"/>
           <p:nvPr/>
         </p:nvSpPr>
@@ -21631,7 +21631,7 @@
       </p:sp>
       <p:sp>
         <p:nvSpPr>
-          <p:cNvPr id="12" name="table card"/>
+          <p:cNvPr id="13" name="table card"/>
           <p:cNvSpPr/>
           <p:nvPr/>
         </p:nvSpPr>
@@ -21665,7 +21665,7 @@
       </p:sp>
       <p:sp>
         <p:nvSpPr>
-          <p:cNvPr id="13" name="Text 9"/>
+          <p:cNvPr id="14" name="Text 9"/>
           <p:cNvSpPr txBox="1"/>
           <p:nvPr/>
         </p:nvSpPr>
@@ -21701,7 +21701,7 @@
       </p:sp>
       <p:graphicFrame>
         <p:nvGraphicFramePr>
-          <p:cNvPr id="25" name="position accuracy"/>
+          <p:cNvPr id="15" name="position accuracy"/>
           <p:cNvGraphicFramePr>
             <a:graphicFrameLocks noGrp="1"/>
           </p:cNvGraphicFramePr>
@@ -22351,7 +22351,7 @@
       </p:graphicFrame>
       <p:sp>
         <p:nvSpPr>
-          <p:cNvPr id="15" name="Text 10"/>
+          <p:cNvPr id="16" name="Text 10"/>
           <p:cNvSpPr txBox="1"/>
           <p:nvPr/>
         </p:nvSpPr>
@@ -22387,7 +22387,7 @@
       </p:sp>
       <p:sp>
         <p:nvSpPr>
-          <p:cNvPr id="16" name="card 50 m 오차가 수 m로: 상대 1 m대, 절대 약 5 m"/>
+          <p:cNvPr id="17" name="card 50 m 오차가 수 m로: 상대 1 m대, 절대 약 5 m"/>
           <p:cNvSpPr/>
           <p:nvPr/>
         </p:nvSpPr>
@@ -22421,7 +22421,7 @@
       </p:sp>
       <p:sp>
         <p:nvSpPr>
-          <p:cNvPr id="17" name="Text 12"/>
+          <p:cNvPr id="18" name="Text 12"/>
           <p:cNvSpPr txBox="1"/>
           <p:nvPr/>
         </p:nvSpPr>
@@ -22457,7 +22457,7 @@
       </p:sp>
       <p:sp>
         <p:nvSpPr>
-          <p:cNvPr id="18" name="Text 13"/>
+          <p:cNvPr id="19" name="Text 13"/>
           <p:cNvSpPr txBox="1"/>
           <p:nvPr/>
         </p:nvSpPr>
@@ -22496,7 +22496,7 @@
       </p:sp>
       <p:sp>
         <p:nvSpPr>
-          <p:cNvPr id="19" name="refs"/>
+          <p:cNvPr id="20" name="refs"/>
           <p:cNvSpPr txBox="1"/>
           <p:nvPr/>
         </p:nvSpPr>
@@ -22532,7 +22532,7 @@
       </p:sp>
       <p:sp>
         <p:nvSpPr>
-          <p:cNvPr id="25" name="Slide Number Placeholder 0"/>
+          <p:cNvPr id="21" name="Slide Number Placeholder 0"/>
           <p:cNvSpPr>
             <a:spLocks noGrp="1"/>
           </p:cNvSpPr>
@@ -22588,7 +22588,7 @@
   <p:cSld name="Slide 25">
     <p:spTree>
       <p:nvGrpSpPr>
-        <p:cNvPr id="1" name=""/>
+        <p:cNvPr id="2" name=""/>
         <p:cNvGrpSpPr/>
         <p:nvPr/>
       </p:nvGrpSpPr>
@@ -22602,7 +22602,7 @@
       </p:grpSpPr>
       <p:sp>
         <p:nvSpPr>
-          <p:cNvPr id="2" name="Text 0"/>
+          <p:cNvPr id="3" name="Text 0"/>
           <p:cNvSpPr/>
           <p:nvPr>
             <p:ph idx="100" type="title" hasCustomPrompt="1"/>
@@ -22640,7 +22640,7 @@
       </p:sp>
       <p:sp>
         <p:nvSpPr>
-          <p:cNvPr id="3" name="subtitle"/>
+          <p:cNvPr id="4" name="subtitle"/>
           <p:cNvSpPr txBox="1"/>
           <p:nvPr/>
         </p:nvSpPr>
@@ -22676,7 +22676,7 @@
       </p:sp>
       <p:sp>
         <p:nvSpPr>
-          <p:cNvPr id="4" name="chart card"/>
+          <p:cNvPr id="5" name="chart card"/>
           <p:cNvSpPr/>
           <p:nvPr/>
         </p:nvSpPr>
@@ -22710,7 +22710,7 @@
       </p:sp>
       <p:sp>
         <p:nvSpPr>
-          <p:cNvPr id="5" name="Text 3"/>
+          <p:cNvPr id="6" name="Text 3"/>
           <p:cNvSpPr txBox="1"/>
           <p:nvPr/>
         </p:nvSpPr>
@@ -22746,7 +22746,7 @@
       </p:sp>
       <p:graphicFrame>
         <p:nvGraphicFramePr>
-          <p:cNvPr id="6" name="Chart 0" descr=""/>
+          <p:cNvPr id="7" name="Chart 0" descr=""/>
           <p:cNvGraphicFramePr/>
           <p:nvPr/>
         </p:nvGraphicFramePr>
@@ -22762,7 +22762,7 @@
       </p:graphicFrame>
       <p:sp>
         <p:nvSpPr>
-          <p:cNvPr id="7" name="card 읽는 법"/>
+          <p:cNvPr id="8" name="card 읽는 법"/>
           <p:cNvSpPr/>
           <p:nvPr/>
         </p:nvSpPr>
@@ -22796,7 +22796,7 @@
       </p:sp>
       <p:sp>
         <p:nvSpPr>
-          <p:cNvPr id="8" name="Text 5"/>
+          <p:cNvPr id="9" name="Text 5"/>
           <p:cNvSpPr txBox="1"/>
           <p:nvPr/>
         </p:nvSpPr>
@@ -22832,7 +22832,7 @@
       </p:sp>
       <p:sp>
         <p:nvSpPr>
-          <p:cNvPr id="9" name="Text 6"/>
+          <p:cNvPr id="10" name="Text 6"/>
           <p:cNvSpPr txBox="1"/>
           <p:nvPr/>
         </p:nvSpPr>
@@ -22871,7 +22871,7 @@
       </p:sp>
       <p:sp>
         <p:nvSpPr>
-          <p:cNvPr id="10" name="stat 확정 핀 중 진짜 (임계값 0.3)"/>
+          <p:cNvPr id="11" name="stat 확정 핀 중 진짜 (임계값 0.3)"/>
           <p:cNvSpPr/>
           <p:nvPr/>
         </p:nvSpPr>
@@ -22905,7 +22905,7 @@
       </p:sp>
       <p:sp>
         <p:nvSpPr>
-          <p:cNvPr id="11" name="Text 8"/>
+          <p:cNvPr id="12" name="Text 8"/>
           <p:cNvSpPr txBox="1"/>
           <p:nvPr/>
         </p:nvSpPr>
@@ -22941,7 +22941,7 @@
       </p:sp>
       <p:sp>
         <p:nvSpPr>
-          <p:cNvPr id="12" name="Text 9"/>
+          <p:cNvPr id="13" name="Text 9"/>
           <p:cNvSpPr txBox="1"/>
           <p:nvPr/>
         </p:nvSpPr>
@@ -22988,7 +22988,7 @@
       </p:sp>
       <p:sp>
         <p:nvSpPr>
-          <p:cNvPr id="13" name="Text 10"/>
+          <p:cNvPr id="14" name="Text 10"/>
           <p:cNvSpPr txBox="1"/>
           <p:nvPr/>
         </p:nvSpPr>
@@ -23024,7 +23024,7 @@
       </p:sp>
       <p:sp>
         <p:nvSpPr>
-          <p:cNvPr id="14" name="stat 야간 상자 탐지 중 진짜 (0015)"/>
+          <p:cNvPr id="15" name="stat 야간 상자 탐지 중 진짜 (0015)"/>
           <p:cNvSpPr/>
           <p:nvPr/>
         </p:nvSpPr>
@@ -23058,7 +23058,7 @@
       </p:sp>
       <p:sp>
         <p:nvSpPr>
-          <p:cNvPr id="15" name="Text 12"/>
+          <p:cNvPr id="16" name="Text 12"/>
           <p:cNvSpPr txBox="1"/>
           <p:nvPr/>
         </p:nvSpPr>
@@ -23094,7 +23094,7 @@
       </p:sp>
       <p:sp>
         <p:nvSpPr>
-          <p:cNvPr id="16" name="Text 13"/>
+          <p:cNvPr id="17" name="Text 13"/>
           <p:cNvSpPr txBox="1"/>
           <p:nvPr/>
         </p:nvSpPr>
@@ -23133,7 +23133,7 @@
       </p:sp>
       <p:sp>
         <p:nvSpPr>
-          <p:cNvPr id="17" name="Text 14"/>
+          <p:cNvPr id="18" name="Text 14"/>
           <p:cNvSpPr txBox="1"/>
           <p:nvPr/>
         </p:nvSpPr>
@@ -23169,7 +23169,7 @@
       </p:sp>
       <p:sp>
         <p:nvSpPr>
-          <p:cNvPr id="18" name="stat 애매한 후보 재촬영 → 기각"/>
+          <p:cNvPr id="19" name="stat 애매한 후보 재촬영 → 기각"/>
           <p:cNvSpPr/>
           <p:nvPr/>
         </p:nvSpPr>
@@ -23203,7 +23203,7 @@
       </p:sp>
       <p:sp>
         <p:nvSpPr>
-          <p:cNvPr id="19" name="Text 16"/>
+          <p:cNvPr id="20" name="Text 16"/>
           <p:cNvSpPr txBox="1"/>
           <p:nvPr/>
         </p:nvSpPr>
@@ -23239,7 +23239,7 @@
       </p:sp>
       <p:sp>
         <p:nvSpPr>
-          <p:cNvPr id="20" name="Text 17"/>
+          <p:cNvPr id="21" name="Text 17"/>
           <p:cNvSpPr txBox="1"/>
           <p:nvPr/>
         </p:nvSpPr>
@@ -23278,7 +23278,7 @@
       </p:sp>
       <p:sp>
         <p:nvSpPr>
-          <p:cNvPr id="21" name="Text 18"/>
+          <p:cNvPr id="22" name="Text 18"/>
           <p:cNvSpPr txBox="1"/>
           <p:nvPr/>
         </p:nvSpPr>
@@ -23314,7 +23314,7 @@
       </p:sp>
       <p:sp>
         <p:nvSpPr>
-          <p:cNvPr id="22" name="Text 19"/>
+          <p:cNvPr id="23" name="Text 19"/>
           <p:cNvSpPr txBox="1"/>
           <p:nvPr/>
         </p:nvSpPr>
@@ -23350,7 +23350,7 @@
       </p:sp>
       <p:graphicFrame>
         <p:nvGraphicFramePr>
-          <p:cNvPr id="26" name="fp layers table"/>
+          <p:cNvPr id="24" name="fp layers table"/>
           <p:cNvGraphicFramePr>
             <a:graphicFrameLocks noGrp="1"/>
           </p:cNvGraphicFramePr>
@@ -24306,7 +24306,7 @@
       </p:graphicFrame>
       <p:sp>
         <p:nvSpPr>
-          <p:cNvPr id="24" name="Text 20"/>
+          <p:cNvPr id="25" name="Text 20"/>
           <p:cNvSpPr txBox="1"/>
           <p:nvPr/>
         </p:nvSpPr>
@@ -24342,7 +24342,7 @@
       </p:sp>
       <p:sp>
         <p:nvSpPr>
-          <p:cNvPr id="25" name="refs"/>
+          <p:cNvPr id="26" name="refs"/>
           <p:cNvSpPr txBox="1"/>
           <p:nvPr/>
         </p:nvSpPr>
@@ -24378,7 +24378,7 @@
       </p:sp>
       <p:sp>
         <p:nvSpPr>
-          <p:cNvPr id="25" name="Slide Number Placeholder 0"/>
+          <p:cNvPr id="27" name="Slide Number Placeholder 0"/>
           <p:cNvSpPr>
             <a:spLocks noGrp="1"/>
           </p:cNvSpPr>
@@ -26081,7 +26081,7 @@
   <p:cSld name="Slide 27">
     <p:spTree>
       <p:nvGrpSpPr>
-        <p:cNvPr id="1" name=""/>
+        <p:cNvPr id="2" name=""/>
         <p:cNvGrpSpPr/>
         <p:nvPr/>
       </p:nvGrpSpPr>
@@ -26095,7 +26095,7 @@
       </p:grpSpPr>
       <p:sp>
         <p:nvSpPr>
-          <p:cNvPr id="2" name="Text 0"/>
+          <p:cNvPr id="3" name="Text 0"/>
           <p:cNvSpPr/>
           <p:nvPr>
             <p:ph idx="100" type="title" hasCustomPrompt="1"/>
@@ -26133,7 +26133,7 @@
       </p:sp>
       <p:sp>
         <p:nvSpPr>
-          <p:cNvPr id="3" name="subtitle"/>
+          <p:cNvPr id="4" name="subtitle"/>
           <p:cNvSpPr txBox="1"/>
           <p:nvPr/>
         </p:nvSpPr>
@@ -26169,7 +26169,7 @@
       </p:sp>
       <p:sp>
         <p:nvSpPr>
-          <p:cNvPr id="4" name="chart card"/>
+          <p:cNvPr id="5" name="chart card"/>
           <p:cNvSpPr/>
           <p:nvPr/>
         </p:nvSpPr>
@@ -26203,7 +26203,7 @@
       </p:sp>
       <p:sp>
         <p:nvSpPr>
-          <p:cNvPr id="5" name="Text 3"/>
+          <p:cNvPr id="6" name="Text 3"/>
           <p:cNvSpPr txBox="1"/>
           <p:nvPr/>
         </p:nvSpPr>
@@ -26239,7 +26239,7 @@
       </p:sp>
       <p:graphicFrame>
         <p:nvGraphicFramePr>
-          <p:cNvPr id="6" name="Chart 0" descr=""/>
+          <p:cNvPr id="7" name="Chart 0" descr=""/>
           <p:cNvGraphicFramePr/>
           <p:nvPr/>
         </p:nvGraphicFramePr>
@@ -26255,7 +26255,7 @@
       </p:graphicFrame>
       <p:sp>
         <p:nvSpPr>
-          <p:cNvPr id="7" name="card 재방문 25회 중 22회 기각"/>
+          <p:cNvPr id="8" name="card 재방문 25회 중 22회 기각"/>
           <p:cNvSpPr/>
           <p:nvPr/>
         </p:nvSpPr>
@@ -26289,7 +26289,7 @@
       </p:sp>
       <p:sp>
         <p:nvSpPr>
-          <p:cNvPr id="8" name="Text 5"/>
+          <p:cNvPr id="9" name="Text 5"/>
           <p:cNvSpPr txBox="1"/>
           <p:nvPr/>
         </p:nvSpPr>
@@ -26325,7 +26325,7 @@
       </p:sp>
       <p:sp>
         <p:nvSpPr>
-          <p:cNvPr id="9" name="Text 6"/>
+          <p:cNvPr id="10" name="Text 6"/>
           <p:cNvSpPr txBox="1"/>
           <p:nvPr/>
         </p:nvSpPr>
@@ -26364,7 +26364,7 @@
       </p:sp>
       <p:pic>
         <p:nvPicPr>
-          <p:cNvPr id="10" name="니하우 수거계획" descr="/tmp/claude-0/-home-user-hsr1m/6022f0b4-b8f8-52b0-8810-837ebd6bfbe9/scratchpad/deck/img/fig_18_하와이_niihau_지도_수거계획.jpg">    </p:cNvPr>
+          <p:cNvPr id="11" name="니하우 수거계획" descr="/tmp/claude-0/-home-user-hsr1m/6022f0b4-b8f8-52b0-8810-837ebd6bfbe9/scratchpad/deck/img/fig_18_하와이_niihau_지도_수거계획.jpg">    </p:cNvPr>
           <p:cNvPicPr>
             <a:picLocks noChangeAspect="1"/>
           </p:cNvPicPr>
@@ -26387,7 +26387,7 @@
       </p:pic>
       <p:sp>
         <p:nvSpPr>
-          <p:cNvPr id="11" name="kpi 탐지 물체"/>
+          <p:cNvPr id="12" name="kpi 탐지 물체"/>
           <p:cNvSpPr/>
           <p:nvPr/>
         </p:nvSpPr>
@@ -26414,7 +26414,7 @@
       </p:sp>
       <p:sp>
         <p:nvSpPr>
-          <p:cNvPr id="12" name="Text 8"/>
+          <p:cNvPr id="13" name="Text 8"/>
           <p:cNvSpPr txBox="1"/>
           <p:nvPr/>
         </p:nvSpPr>
@@ -26450,7 +26450,7 @@
       </p:sp>
       <p:sp>
         <p:nvSpPr>
-          <p:cNvPr id="13" name="Text 9"/>
+          <p:cNvPr id="14" name="Text 9"/>
           <p:cNvSpPr txBox="1"/>
           <p:nvPr/>
         </p:nvSpPr>
@@ -26486,7 +26486,7 @@
       </p:sp>
       <p:sp>
         <p:nvSpPr>
-          <p:cNvPr id="14" name="Text 10"/>
+          <p:cNvPr id="15" name="Text 10"/>
           <p:cNvSpPr txBox="1"/>
           <p:nvPr/>
         </p:nvSpPr>
@@ -26522,7 +26522,7 @@
       </p:sp>
       <p:sp>
         <p:nvSpPr>
-          <p:cNvPr id="15" name="kpi 무게 구간"/>
+          <p:cNvPr id="16" name="kpi 무게 구간"/>
           <p:cNvSpPr/>
           <p:nvPr/>
         </p:nvSpPr>
@@ -26549,7 +26549,7 @@
       </p:sp>
       <p:sp>
         <p:nvSpPr>
-          <p:cNvPr id="16" name="Text 12"/>
+          <p:cNvPr id="17" name="Text 12"/>
           <p:cNvSpPr txBox="1"/>
           <p:nvPr/>
         </p:nvSpPr>
@@ -26585,7 +26585,7 @@
       </p:sp>
       <p:sp>
         <p:nvSpPr>
-          <p:cNvPr id="17" name="Text 13"/>
+          <p:cNvPr id="18" name="Text 13"/>
           <p:cNvSpPr txBox="1"/>
           <p:nvPr/>
         </p:nvSpPr>
@@ -26621,7 +26621,7 @@
       </p:sp>
       <p:sp>
         <p:nvSpPr>
-          <p:cNvPr id="18" name="Text 14"/>
+          <p:cNvPr id="19" name="Text 14"/>
           <p:cNvSpPr txBox="1"/>
           <p:nvPr/>
         </p:nvSpPr>
@@ -26657,7 +26657,7 @@
       </p:sp>
       <p:sp>
         <p:nvSpPr>
-          <p:cNvPr id="19" name="kpi 마대 · 트럭"/>
+          <p:cNvPr id="20" name="kpi 마대 · 트럭"/>
           <p:cNvSpPr/>
           <p:nvPr/>
         </p:nvSpPr>
@@ -26684,7 +26684,7 @@
       </p:sp>
       <p:sp>
         <p:nvSpPr>
-          <p:cNvPr id="20" name="Text 16"/>
+          <p:cNvPr id="21" name="Text 16"/>
           <p:cNvSpPr txBox="1"/>
           <p:nvPr/>
         </p:nvSpPr>
@@ -26720,7 +26720,7 @@
       </p:sp>
       <p:sp>
         <p:nvSpPr>
-          <p:cNvPr id="21" name="Text 17"/>
+          <p:cNvPr id="22" name="Text 17"/>
           <p:cNvSpPr txBox="1"/>
           <p:nvPr/>
         </p:nvSpPr>
@@ -26756,7 +26756,7 @@
       </p:sp>
       <p:sp>
         <p:nvSpPr>
-          <p:cNvPr id="22" name="Text 18"/>
+          <p:cNvPr id="23" name="Text 18"/>
           <p:cNvSpPr txBox="1"/>
           <p:nvPr/>
         </p:nvSpPr>
@@ -26792,7 +26792,7 @@
       </p:sp>
       <p:sp>
         <p:nvSpPr>
-          <p:cNvPr id="23" name="kpi 인력 구분"/>
+          <p:cNvPr id="24" name="kpi 인력 구분"/>
           <p:cNvSpPr/>
           <p:nvPr/>
         </p:nvSpPr>
@@ -26819,7 +26819,7 @@
       </p:sp>
       <p:sp>
         <p:nvSpPr>
-          <p:cNvPr id="24" name="Text 20"/>
+          <p:cNvPr id="25" name="Text 20"/>
           <p:cNvSpPr txBox="1"/>
           <p:nvPr/>
         </p:nvSpPr>
@@ -26855,7 +26855,7 @@
       </p:sp>
       <p:sp>
         <p:nvSpPr>
-          <p:cNvPr id="25" name="Text 21"/>
+          <p:cNvPr id="26" name="Text 21"/>
           <p:cNvSpPr txBox="1"/>
           <p:nvPr/>
         </p:nvSpPr>
@@ -26891,7 +26891,7 @@
       </p:sp>
       <p:sp>
         <p:nvSpPr>
-          <p:cNvPr id="26" name="Text 22"/>
+          <p:cNvPr id="27" name="Text 22"/>
           <p:cNvSpPr txBox="1"/>
           <p:nvPr/>
         </p:nvSpPr>
@@ -26927,7 +26927,7 @@
       </p:sp>
       <p:sp>
         <p:nvSpPr>
-          <p:cNvPr id="27" name="refs"/>
+          <p:cNvPr id="28" name="refs"/>
           <p:cNvSpPr txBox="1"/>
           <p:nvPr/>
         </p:nvSpPr>
@@ -26963,7 +26963,7 @@
       </p:sp>
       <p:sp>
         <p:nvSpPr>
-          <p:cNvPr id="25" name="Slide Number Placeholder 0"/>
+          <p:cNvPr id="29" name="Slide Number Placeholder 0"/>
           <p:cNvSpPr>
             <a:spLocks noGrp="1"/>
           </p:cNvSpPr>
@@ -33354,7 +33354,7 @@
   <p:cSld name="Slide 32">
     <p:spTree>
       <p:nvGrpSpPr>
-        <p:cNvPr id="1" name=""/>
+        <p:cNvPr id="2" name=""/>
         <p:cNvGrpSpPr/>
         <p:nvPr/>
       </p:nvGrpSpPr>
@@ -33368,7 +33368,7 @@
       </p:grpSpPr>
       <p:sp>
         <p:nvSpPr>
-          <p:cNvPr id="2" name="Text 0"/>
+          <p:cNvPr id="3" name="Text 0"/>
           <p:cNvSpPr/>
           <p:nvPr>
             <p:ph idx="100" type="title" hasCustomPrompt="1"/>
@@ -33406,7 +33406,7 @@
       </p:sp>
       <p:sp>
         <p:nvSpPr>
-          <p:cNvPr id="3" name="subtitle"/>
+          <p:cNvPr id="4" name="subtitle"/>
           <p:cNvSpPr txBox="1"/>
           <p:nvPr/>
         </p:nvSpPr>
@@ -33442,7 +33442,7 @@
       </p:sp>
       <p:sp>
         <p:nvSpPr>
-          <p:cNvPr id="4" name="role 3DLabs · 위성 계층"/>
+          <p:cNvPr id="5" name="role 3DLabs · 위성 계층"/>
           <p:cNvSpPr/>
           <p:nvPr/>
         </p:nvSpPr>
@@ -33469,7 +33469,7 @@
       </p:sp>
       <p:sp>
         <p:nvSpPr>
-          <p:cNvPr id="5" name="icon circle"/>
+          <p:cNvPr id="6" name="icon circle"/>
           <p:cNvSpPr/>
           <p:nvPr/>
         </p:nvSpPr>
@@ -33494,7 +33494,7 @@
       </p:sp>
       <p:pic>
         <p:nvPicPr>
-          <p:cNvPr id="6" name="icon FaSatellite" descr="preencoded.png">    </p:cNvPr>
+          <p:cNvPr id="7" name="icon FaSatellite" descr="preencoded.png">    </p:cNvPr>
           <p:cNvPicPr>
             <a:picLocks noChangeAspect="1"/>
           </p:cNvPicPr>
@@ -33518,7 +33518,7 @@
       </p:pic>
       <p:sp>
         <p:nvSpPr>
-          <p:cNvPr id="7" name="Text 4"/>
+          <p:cNvPr id="8" name="Text 4"/>
           <p:cNvSpPr txBox="1"/>
           <p:nvPr/>
         </p:nvSpPr>
@@ -33554,7 +33554,7 @@
       </p:sp>
       <p:sp>
         <p:nvSpPr>
-          <p:cNvPr id="8" name="Text 5"/>
+          <p:cNvPr id="9" name="Text 5"/>
           <p:cNvSpPr txBox="1"/>
           <p:nvPr/>
         </p:nvSpPr>
@@ -33630,7 +33630,7 @@
       </p:sp>
       <p:sp>
         <p:nvSpPr>
-          <p:cNvPr id="9" name="arrow"/>
+          <p:cNvPr id="10" name="arrow"/>
           <p:cNvSpPr/>
           <p:nvPr/>
         </p:nvSpPr>
@@ -33655,7 +33655,7 @@
       </p:sp>
       <p:sp>
         <p:nvSpPr>
-          <p:cNvPr id="10" name="role DroneSweep · 드론 계층"/>
+          <p:cNvPr id="11" name="role DroneSweep · 드론 계층"/>
           <p:cNvSpPr/>
           <p:nvPr/>
         </p:nvSpPr>
@@ -33682,7 +33682,7 @@
       </p:sp>
       <p:sp>
         <p:nvSpPr>
-          <p:cNvPr id="11" name="icon circle"/>
+          <p:cNvPr id="12" name="icon circle"/>
           <p:cNvSpPr/>
           <p:nvPr/>
         </p:nvSpPr>
@@ -33707,7 +33707,7 @@
       </p:sp>
       <p:pic>
         <p:nvPicPr>
-          <p:cNvPr id="12" name="icon FaPlane" descr="preencoded.png">    </p:cNvPr>
+          <p:cNvPr id="13" name="icon FaPlane" descr="preencoded.png">    </p:cNvPr>
           <p:cNvPicPr>
             <a:picLocks noChangeAspect="1"/>
           </p:cNvPicPr>
@@ -33731,7 +33731,7 @@
       </p:pic>
       <p:sp>
         <p:nvSpPr>
-          <p:cNvPr id="13" name="Text 9"/>
+          <p:cNvPr id="14" name="Text 9"/>
           <p:cNvSpPr txBox="1"/>
           <p:nvPr/>
         </p:nvSpPr>
@@ -33767,7 +33767,7 @@
       </p:sp>
       <p:sp>
         <p:nvSpPr>
-          <p:cNvPr id="14" name="Text 10"/>
+          <p:cNvPr id="15" name="Text 10"/>
           <p:cNvSpPr txBox="1"/>
           <p:nvPr/>
         </p:nvSpPr>
@@ -33843,7 +33843,7 @@
       </p:sp>
       <p:sp>
         <p:nvSpPr>
-          <p:cNvPr id="15" name="arrow"/>
+          <p:cNvPr id="16" name="arrow"/>
           <p:cNvSpPr/>
           <p:nvPr/>
         </p:nvSpPr>
@@ -33868,7 +33868,7 @@
       </p:sp>
       <p:sp>
         <p:nvSpPr>
-          <p:cNvPr id="16" name="role 고객 · 지자체 계층"/>
+          <p:cNvPr id="17" name="role 고객 · 지자체 계층"/>
           <p:cNvSpPr/>
           <p:nvPr/>
         </p:nvSpPr>
@@ -33902,7 +33902,7 @@
       </p:sp>
       <p:sp>
         <p:nvSpPr>
-          <p:cNvPr id="17" name="icon circle"/>
+          <p:cNvPr id="18" name="icon circle"/>
           <p:cNvSpPr/>
           <p:nvPr/>
         </p:nvSpPr>
@@ -33927,7 +33927,7 @@
       </p:sp>
       <p:pic>
         <p:nvPicPr>
-          <p:cNvPr id="18" name="icon FaUsers" descr="preencoded.png">    </p:cNvPr>
+          <p:cNvPr id="19" name="icon FaUsers" descr="preencoded.png">    </p:cNvPr>
           <p:cNvPicPr>
             <a:picLocks noChangeAspect="1"/>
           </p:cNvPicPr>
@@ -33951,7 +33951,7 @@
       </p:pic>
       <p:sp>
         <p:nvSpPr>
-          <p:cNvPr id="19" name="Text 14"/>
+          <p:cNvPr id="20" name="Text 14"/>
           <p:cNvSpPr txBox="1"/>
           <p:nvPr/>
         </p:nvSpPr>
@@ -33987,7 +33987,7 @@
       </p:sp>
       <p:sp>
         <p:nvSpPr>
-          <p:cNvPr id="20" name="Text 15"/>
+          <p:cNvPr id="21" name="Text 15"/>
           <p:cNvSpPr txBox="1"/>
           <p:nvPr/>
         </p:nvSpPr>
@@ -34063,7 +34063,7 @@
       </p:sp>
       <p:sp>
         <p:nvSpPr>
-          <p:cNvPr id="21" name="Text 16"/>
+          <p:cNvPr id="22" name="Text 16"/>
           <p:cNvSpPr txBox="1"/>
           <p:nvPr/>
         </p:nvSpPr>
@@ -34099,7 +34099,7 @@
       </p:sp>
       <p:sp>
         <p:nvSpPr>
-          <p:cNvPr id="22" name="signal 0"/>
+          <p:cNvPr id="23" name="signal 0"/>
           <p:cNvSpPr/>
           <p:nvPr/>
         </p:nvSpPr>
@@ -34126,7 +34126,7 @@
       </p:sp>
       <p:sp>
         <p:nvSpPr>
-          <p:cNvPr id="23" name="Text 18"/>
+          <p:cNvPr id="24" name="Text 18"/>
           <p:cNvSpPr txBox="1"/>
           <p:nvPr/>
         </p:nvSpPr>
@@ -34162,7 +34162,7 @@
       </p:sp>
       <p:sp>
         <p:nvSpPr>
-          <p:cNvPr id="24" name="Text 19"/>
+          <p:cNvPr id="25" name="Text 19"/>
           <p:cNvSpPr txBox="1"/>
           <p:nvPr/>
         </p:nvSpPr>
@@ -34198,7 +34198,7 @@
       </p:sp>
       <p:sp>
         <p:nvSpPr>
-          <p:cNvPr id="25" name="signal 1"/>
+          <p:cNvPr id="26" name="signal 1"/>
           <p:cNvSpPr/>
           <p:nvPr/>
         </p:nvSpPr>
@@ -34225,7 +34225,7 @@
       </p:sp>
       <p:sp>
         <p:nvSpPr>
-          <p:cNvPr id="26" name="Text 21"/>
+          <p:cNvPr id="27" name="Text 21"/>
           <p:cNvSpPr txBox="1"/>
           <p:nvPr/>
         </p:nvSpPr>
@@ -34261,7 +34261,7 @@
       </p:sp>
       <p:sp>
         <p:nvSpPr>
-          <p:cNvPr id="27" name="Text 22"/>
+          <p:cNvPr id="28" name="Text 22"/>
           <p:cNvSpPr txBox="1"/>
           <p:nvPr/>
         </p:nvSpPr>
@@ -34297,7 +34297,7 @@
       </p:sp>
       <p:sp>
         <p:nvSpPr>
-          <p:cNvPr id="28" name="signal 2"/>
+          <p:cNvPr id="29" name="signal 2"/>
           <p:cNvSpPr/>
           <p:nvPr/>
         </p:nvSpPr>
@@ -34324,7 +34324,7 @@
       </p:sp>
       <p:sp>
         <p:nvSpPr>
-          <p:cNvPr id="29" name="Text 24"/>
+          <p:cNvPr id="30" name="Text 24"/>
           <p:cNvSpPr txBox="1"/>
           <p:nvPr/>
         </p:nvSpPr>
@@ -34360,7 +34360,7 @@
       </p:sp>
       <p:sp>
         <p:nvSpPr>
-          <p:cNvPr id="30" name="Text 25"/>
+          <p:cNvPr id="31" name="Text 25"/>
           <p:cNvSpPr txBox="1"/>
           <p:nvPr/>
         </p:nvSpPr>
@@ -34396,7 +34396,7 @@
       </p:sp>
       <p:sp>
         <p:nvSpPr>
-          <p:cNvPr id="31" name="source"/>
+          <p:cNvPr id="32" name="source"/>
           <p:cNvSpPr txBox="1"/>
           <p:nvPr/>
         </p:nvSpPr>
@@ -34432,7 +34432,7 @@
       </p:sp>
       <p:sp>
         <p:nvSpPr>
-          <p:cNvPr id="25" name="Slide Number Placeholder 0"/>
+          <p:cNvPr id="33" name="Slide Number Placeholder 0"/>
           <p:cNvSpPr>
             <a:spLocks noGrp="1"/>
           </p:cNvSpPr>
@@ -36656,7 +36656,7 @@
   <p:cSld name="Slide 34">
     <p:spTree>
       <p:nvGrpSpPr>
-        <p:cNvPr id="1" name=""/>
+        <p:cNvPr id="2" name=""/>
         <p:cNvGrpSpPr/>
         <p:nvPr/>
       </p:nvGrpSpPr>
@@ -36670,7 +36670,7 @@
       </p:grpSpPr>
       <p:sp>
         <p:nvSpPr>
-          <p:cNvPr id="2" name="Text 0"/>
+          <p:cNvPr id="3" name="Text 0"/>
           <p:cNvSpPr/>
           <p:nvPr>
             <p:ph idx="100" type="title" hasCustomPrompt="1"/>
@@ -36708,7 +36708,7 @@
       </p:sp>
       <p:sp>
         <p:nvSpPr>
-          <p:cNvPr id="3" name="subtitle"/>
+          <p:cNvPr id="4" name="subtitle"/>
           <p:cNvSpPr txBox="1"/>
           <p:nvPr/>
         </p:nvSpPr>
@@ -36744,7 +36744,7 @@
       </p:sp>
       <p:sp>
         <p:nvSpPr>
-          <p:cNvPr id="4" name="tech 어디를 날지"/>
+          <p:cNvPr id="5" name="tech 어디를 날지"/>
           <p:cNvSpPr/>
           <p:nvPr/>
         </p:nvSpPr>
@@ -36778,7 +36778,7 @@
       </p:sp>
       <p:sp>
         <p:nvSpPr>
-          <p:cNvPr id="5" name="icon circle"/>
+          <p:cNvPr id="6" name="icon circle"/>
           <p:cNvSpPr/>
           <p:nvPr/>
         </p:nvSpPr>
@@ -36803,7 +36803,7 @@
       </p:sp>
       <p:pic>
         <p:nvPicPr>
-          <p:cNvPr id="6" name="icon FaSatellite" descr="preencoded.png">    </p:cNvPr>
+          <p:cNvPr id="7" name="icon FaSatellite" descr="preencoded.png">    </p:cNvPr>
           <p:cNvPicPr>
             <a:picLocks noChangeAspect="1"/>
           </p:cNvPicPr>
@@ -36827,7 +36827,7 @@
       </p:pic>
       <p:sp>
         <p:nvSpPr>
-          <p:cNvPr id="7" name="Text 4"/>
+          <p:cNvPr id="8" name="Text 4"/>
           <p:cNvSpPr txBox="1"/>
           <p:nvPr/>
         </p:nvSpPr>
@@ -36863,7 +36863,7 @@
       </p:sp>
       <p:sp>
         <p:nvSpPr>
-          <p:cNvPr id="8" name="Text 5"/>
+          <p:cNvPr id="9" name="Text 5"/>
           <p:cNvSpPr txBox="1"/>
           <p:nvPr/>
         </p:nvSpPr>
@@ -36899,7 +36899,7 @@
       </p:sp>
       <p:sp>
         <p:nvSpPr>
-          <p:cNvPr id="9" name="Text 6"/>
+          <p:cNvPr id="10" name="Text 6"/>
           <p:cNvSpPr txBox="1"/>
           <p:nvPr/>
         </p:nvSpPr>
@@ -36935,7 +36935,7 @@
       </p:sp>
       <p:sp>
         <p:nvSpPr>
-          <p:cNvPr id="10" name="Text 7"/>
+          <p:cNvPr id="11" name="Text 7"/>
           <p:cNvSpPr txBox="1"/>
           <p:nvPr/>
         </p:nvSpPr>
@@ -36971,7 +36971,7 @@
       </p:sp>
       <p:sp>
         <p:nvSpPr>
-          <p:cNvPr id="11" name="result"/>
+          <p:cNvPr id="12" name="result"/>
           <p:cNvSpPr/>
           <p:nvPr/>
         </p:nvSpPr>
@@ -36998,7 +36998,7 @@
       </p:sp>
       <p:sp>
         <p:nvSpPr>
-          <p:cNvPr id="12" name="Text 9"/>
+          <p:cNvPr id="13" name="Text 9"/>
           <p:cNvSpPr txBox="1"/>
           <p:nvPr/>
         </p:nvSpPr>
@@ -37034,7 +37034,7 @@
       </p:sp>
       <p:sp>
         <p:nvSpPr>
-          <p:cNvPr id="13" name="Text 10"/>
+          <p:cNvPr id="14" name="Text 10"/>
           <p:cNvSpPr txBox="1"/>
           <p:nvPr/>
         </p:nvSpPr>
@@ -37070,7 +37070,7 @@
       </p:sp>
       <p:sp>
         <p:nvSpPr>
-          <p:cNvPr id="14" name="Text 11"/>
+          <p:cNvPr id="15" name="Text 11"/>
           <p:cNvSpPr txBox="1"/>
           <p:nvPr/>
         </p:nvSpPr>
@@ -37106,7 +37106,7 @@
       </p:sp>
       <p:sp>
         <p:nvSpPr>
-          <p:cNvPr id="15" name="arrow"/>
+          <p:cNvPr id="16" name="arrow"/>
           <p:cNvSpPr/>
           <p:nvPr/>
         </p:nvSpPr>
@@ -37131,7 +37131,7 @@
       </p:sp>
       <p:sp>
         <p:nvSpPr>
-          <p:cNvPr id="16" name="tech 무엇이 어디에 얼마나"/>
+          <p:cNvPr id="17" name="tech 무엇이 어디에 얼마나"/>
           <p:cNvSpPr/>
           <p:nvPr/>
         </p:nvSpPr>
@@ -37165,7 +37165,7 @@
       </p:sp>
       <p:sp>
         <p:nvSpPr>
-          <p:cNvPr id="17" name="icon circle"/>
+          <p:cNvPr id="18" name="icon circle"/>
           <p:cNvSpPr/>
           <p:nvPr/>
         </p:nvSpPr>
@@ -37190,7 +37190,7 @@
       </p:sp>
       <p:pic>
         <p:nvPicPr>
-          <p:cNvPr id="18" name="icon FaCubes" descr="preencoded.png">    </p:cNvPr>
+          <p:cNvPr id="19" name="icon FaCubes" descr="preencoded.png">    </p:cNvPr>
           <p:cNvPicPr>
             <a:picLocks noChangeAspect="1"/>
           </p:cNvPicPr>
@@ -37214,7 +37214,7 @@
       </p:pic>
       <p:sp>
         <p:nvSpPr>
-          <p:cNvPr id="19" name="Text 15"/>
+          <p:cNvPr id="20" name="Text 15"/>
           <p:cNvSpPr txBox="1"/>
           <p:nvPr/>
         </p:nvSpPr>
@@ -37250,7 +37250,7 @@
       </p:sp>
       <p:sp>
         <p:nvSpPr>
-          <p:cNvPr id="20" name="Text 16"/>
+          <p:cNvPr id="21" name="Text 16"/>
           <p:cNvSpPr txBox="1"/>
           <p:nvPr/>
         </p:nvSpPr>
@@ -37286,7 +37286,7 @@
       </p:sp>
       <p:sp>
         <p:nvSpPr>
-          <p:cNvPr id="21" name="Text 17"/>
+          <p:cNvPr id="22" name="Text 17"/>
           <p:cNvSpPr txBox="1"/>
           <p:nvPr/>
         </p:nvSpPr>
@@ -37322,7 +37322,7 @@
       </p:sp>
       <p:sp>
         <p:nvSpPr>
-          <p:cNvPr id="22" name="Text 18"/>
+          <p:cNvPr id="23" name="Text 18"/>
           <p:cNvSpPr txBox="1"/>
           <p:nvPr/>
         </p:nvSpPr>
@@ -37358,7 +37358,7 @@
       </p:sp>
       <p:sp>
         <p:nvSpPr>
-          <p:cNvPr id="23" name="result"/>
+          <p:cNvPr id="24" name="result"/>
           <p:cNvSpPr/>
           <p:nvPr/>
         </p:nvSpPr>
@@ -37385,7 +37385,7 @@
       </p:sp>
       <p:sp>
         <p:nvSpPr>
-          <p:cNvPr id="24" name="Text 20"/>
+          <p:cNvPr id="25" name="Text 20"/>
           <p:cNvSpPr txBox="1"/>
           <p:nvPr/>
         </p:nvSpPr>
@@ -37421,7 +37421,7 @@
       </p:sp>
       <p:sp>
         <p:nvSpPr>
-          <p:cNvPr id="25" name="Text 21"/>
+          <p:cNvPr id="26" name="Text 21"/>
           <p:cNvSpPr txBox="1"/>
           <p:nvPr/>
         </p:nvSpPr>
@@ -37457,7 +37457,7 @@
       </p:sp>
       <p:sp>
         <p:nvSpPr>
-          <p:cNvPr id="26" name="Text 22"/>
+          <p:cNvPr id="27" name="Text 22"/>
           <p:cNvSpPr txBox="1"/>
           <p:nvPr/>
         </p:nvSpPr>
@@ -37493,7 +37493,7 @@
       </p:sp>
       <p:sp>
         <p:nvSpPr>
-          <p:cNvPr id="27" name="arrow"/>
+          <p:cNvPr id="28" name="arrow"/>
           <p:cNvSpPr/>
           <p:nvPr/>
         </p:nvSpPr>
@@ -37518,7 +37518,7 @@
       </p:sp>
       <p:sp>
         <p:nvSpPr>
-          <p:cNvPr id="28" name="tech 그래서 몇 대"/>
+          <p:cNvPr id="29" name="tech 그래서 몇 대"/>
           <p:cNvSpPr/>
           <p:nvPr/>
         </p:nvSpPr>
@@ -37552,7 +37552,7 @@
       </p:sp>
       <p:sp>
         <p:nvSpPr>
-          <p:cNvPr id="29" name="icon circle"/>
+          <p:cNvPr id="30" name="icon circle"/>
           <p:cNvSpPr/>
           <p:nvPr/>
         </p:nvSpPr>
@@ -37577,7 +37577,7 @@
       </p:sp>
       <p:pic>
         <p:nvPicPr>
-          <p:cNvPr id="30" name="icon FaTruck" descr="preencoded.png">    </p:cNvPr>
+          <p:cNvPr id="31" name="icon FaTruck" descr="preencoded.png">    </p:cNvPr>
           <p:cNvPicPr>
             <a:picLocks noChangeAspect="1"/>
           </p:cNvPicPr>
@@ -37601,7 +37601,7 @@
       </p:pic>
       <p:sp>
         <p:nvSpPr>
-          <p:cNvPr id="31" name="Text 26"/>
+          <p:cNvPr id="32" name="Text 26"/>
           <p:cNvSpPr txBox="1"/>
           <p:nvPr/>
         </p:nvSpPr>
@@ -37637,7 +37637,7 @@
       </p:sp>
       <p:sp>
         <p:nvSpPr>
-          <p:cNvPr id="32" name="Text 27"/>
+          <p:cNvPr id="33" name="Text 27"/>
           <p:cNvSpPr txBox="1"/>
           <p:nvPr/>
         </p:nvSpPr>
@@ -37673,7 +37673,7 @@
       </p:sp>
       <p:sp>
         <p:nvSpPr>
-          <p:cNvPr id="33" name="Text 28"/>
+          <p:cNvPr id="34" name="Text 28"/>
           <p:cNvSpPr txBox="1"/>
           <p:nvPr/>
         </p:nvSpPr>
@@ -37709,7 +37709,7 @@
       </p:sp>
       <p:sp>
         <p:nvSpPr>
-          <p:cNvPr id="34" name="Text 29"/>
+          <p:cNvPr id="35" name="Text 29"/>
           <p:cNvSpPr txBox="1"/>
           <p:nvPr/>
         </p:nvSpPr>
@@ -37745,7 +37745,7 @@
       </p:sp>
       <p:sp>
         <p:nvSpPr>
-          <p:cNvPr id="35" name="result"/>
+          <p:cNvPr id="36" name="result"/>
           <p:cNvSpPr/>
           <p:nvPr/>
         </p:nvSpPr>
@@ -37772,7 +37772,7 @@
       </p:sp>
       <p:sp>
         <p:nvSpPr>
-          <p:cNvPr id="36" name="Text 31"/>
+          <p:cNvPr id="37" name="Text 31"/>
           <p:cNvSpPr txBox="1"/>
           <p:nvPr/>
         </p:nvSpPr>
@@ -37808,7 +37808,7 @@
       </p:sp>
       <p:sp>
         <p:nvSpPr>
-          <p:cNvPr id="37" name="Text 32"/>
+          <p:cNvPr id="38" name="Text 32"/>
           <p:cNvSpPr txBox="1"/>
           <p:nvPr/>
         </p:nvSpPr>
@@ -37844,7 +37844,7 @@
       </p:sp>
       <p:sp>
         <p:nvSpPr>
-          <p:cNvPr id="38" name="Text 33"/>
+          <p:cNvPr id="39" name="Text 33"/>
           <p:cNvSpPr txBox="1"/>
           <p:nvPr/>
         </p:nvSpPr>
@@ -37880,7 +37880,7 @@
       </p:sp>
       <p:sp>
         <p:nvSpPr>
-          <p:cNvPr id="39" name="io"/>
+          <p:cNvPr id="40" name="io"/>
           <p:cNvSpPr/>
           <p:nvPr/>
         </p:nvSpPr>
@@ -37907,7 +37907,7 @@
       </p:sp>
       <p:sp>
         <p:nvSpPr>
-          <p:cNvPr id="40" name="Text 35"/>
+          <p:cNvPr id="41" name="Text 35"/>
           <p:cNvSpPr txBox="1"/>
           <p:nvPr/>
         </p:nvSpPr>
@@ -37943,7 +37943,7 @@
       </p:sp>
       <p:sp>
         <p:nvSpPr>
-          <p:cNvPr id="25" name="Slide Number Placeholder 0"/>
+          <p:cNvPr id="42" name="Slide Number Placeholder 0"/>
           <p:cNvSpPr>
             <a:spLocks noGrp="1"/>
           </p:cNvSpPr>
@@ -39691,7 +39691,7 @@
   <p:cSld name="Slide 5">
     <p:spTree>
       <p:nvGrpSpPr>
-        <p:cNvPr id="1" name=""/>
+        <p:cNvPr id="2" name=""/>
         <p:cNvGrpSpPr/>
         <p:nvPr/>
       </p:nvGrpSpPr>
@@ -39705,7 +39705,7 @@
       </p:grpSpPr>
       <p:sp>
         <p:nvSpPr>
-          <p:cNvPr id="2" name="Text 0"/>
+          <p:cNvPr id="3" name="Text 0"/>
           <p:cNvSpPr/>
           <p:nvPr>
             <p:ph idx="100" type="title" hasCustomPrompt="1"/>
@@ -39743,7 +39743,7 @@
       </p:sp>
       <p:sp>
         <p:nvSpPr>
-          <p:cNvPr id="3" name="subtitle"/>
+          <p:cNvPr id="4" name="subtitle"/>
           <p:cNvSpPr txBox="1"/>
           <p:nvPr/>
         </p:nvSpPr>
@@ -39779,7 +39779,7 @@
       </p:sp>
       <p:sp>
         <p:nvSpPr>
-          <p:cNvPr id="4" name="dot"/>
+          <p:cNvPr id="5" name="dot"/>
           <p:cNvSpPr/>
           <p:nvPr/>
         </p:nvSpPr>
@@ -39804,7 +39804,7 @@
       </p:sp>
       <p:sp>
         <p:nvSpPr>
-          <p:cNvPr id="5" name="line"/>
+          <p:cNvPr id="6" name="line"/>
           <p:cNvSpPr/>
           <p:nvPr/>
         </p:nvSpPr>
@@ -39827,7 +39827,7 @@
       </p:sp>
       <p:sp>
         <p:nvSpPr>
-          <p:cNvPr id="6" name="Text 4"/>
+          <p:cNvPr id="7" name="Text 4"/>
           <p:cNvSpPr txBox="1"/>
           <p:nvPr/>
         </p:nvSpPr>
@@ -39863,7 +39863,7 @@
       </p:sp>
       <p:sp>
         <p:nvSpPr>
-          <p:cNvPr id="7" name="tl 방향 전환"/>
+          <p:cNvPr id="8" name="tl 방향 전환"/>
           <p:cNvSpPr/>
           <p:nvPr/>
         </p:nvSpPr>
@@ -39897,7 +39897,7 @@
       </p:sp>
       <p:sp>
         <p:nvSpPr>
-          <p:cNvPr id="8" name="Text 6"/>
+          <p:cNvPr id="9" name="Text 6"/>
           <p:cNvSpPr txBox="1"/>
           <p:nvPr/>
         </p:nvSpPr>
@@ -39933,7 +39933,7 @@
       </p:sp>
       <p:sp>
         <p:nvSpPr>
-          <p:cNvPr id="9" name="Text 7"/>
+          <p:cNvPr id="10" name="Text 7"/>
           <p:cNvSpPr txBox="1"/>
           <p:nvPr/>
         </p:nvSpPr>
@@ -39969,7 +39969,7 @@
       </p:sp>
       <p:sp>
         <p:nvSpPr>
-          <p:cNvPr id="10" name="dot"/>
+          <p:cNvPr id="11" name="dot"/>
           <p:cNvSpPr/>
           <p:nvPr/>
         </p:nvSpPr>
@@ -39994,7 +39994,7 @@
       </p:sp>
       <p:sp>
         <p:nvSpPr>
-          <p:cNvPr id="11" name="line"/>
+          <p:cNvPr id="12" name="line"/>
           <p:cNvSpPr/>
           <p:nvPr/>
         </p:nvSpPr>
@@ -40017,7 +40017,7 @@
       </p:sp>
       <p:sp>
         <p:nvSpPr>
-          <p:cNvPr id="12" name="Text 10"/>
+          <p:cNvPr id="13" name="Text 10"/>
           <p:cNvSpPr txBox="1"/>
           <p:nvPr/>
         </p:nvSpPr>
@@ -40053,7 +40053,7 @@
       </p:sp>
       <p:sp>
         <p:nvSpPr>
-          <p:cNvPr id="13" name="tl 송도 촬영 · 학습셋"/>
+          <p:cNvPr id="14" name="tl 송도 촬영 · 학습셋"/>
           <p:cNvSpPr/>
           <p:nvPr/>
         </p:nvSpPr>
@@ -40087,7 +40087,7 @@
       </p:sp>
       <p:sp>
         <p:nvSpPr>
-          <p:cNvPr id="14" name="Text 12"/>
+          <p:cNvPr id="15" name="Text 12"/>
           <p:cNvSpPr txBox="1"/>
           <p:nvPr/>
         </p:nvSpPr>
@@ -40123,7 +40123,7 @@
       </p:sp>
       <p:sp>
         <p:nvSpPr>
-          <p:cNvPr id="15" name="Text 13"/>
+          <p:cNvPr id="16" name="Text 13"/>
           <p:cNvSpPr txBox="1"/>
           <p:nvPr/>
         </p:nvSpPr>
@@ -40159,7 +40159,7 @@
       </p:sp>
       <p:sp>
         <p:nvSpPr>
-          <p:cNvPr id="16" name="dot"/>
+          <p:cNvPr id="17" name="dot"/>
           <p:cNvSpPr/>
           <p:nvPr/>
         </p:nvSpPr>
@@ -40184,7 +40184,7 @@
       </p:sp>
       <p:sp>
         <p:nvSpPr>
-          <p:cNvPr id="17" name="line"/>
+          <p:cNvPr id="18" name="line"/>
           <p:cNvSpPr/>
           <p:nvPr/>
         </p:nvSpPr>
@@ -40207,7 +40207,7 @@
       </p:sp>
       <p:sp>
         <p:nvSpPr>
-          <p:cNvPr id="18" name="Text 16"/>
+          <p:cNvPr id="19" name="Text 16"/>
           <p:cNvSpPr txBox="1"/>
           <p:nvPr/>
         </p:nvSpPr>
@@ -40243,7 +40243,7 @@
       </p:sp>
       <p:sp>
         <p:nvSpPr>
-          <p:cNvPr id="19" name="tl 야간 촬영 · 3D v2"/>
+          <p:cNvPr id="20" name="tl 야간 촬영 · 3D v2"/>
           <p:cNvSpPr/>
           <p:nvPr/>
         </p:nvSpPr>
@@ -40277,7 +40277,7 @@
       </p:sp>
       <p:sp>
         <p:nvSpPr>
-          <p:cNvPr id="20" name="Text 18"/>
+          <p:cNvPr id="21" name="Text 18"/>
           <p:cNvSpPr txBox="1"/>
           <p:nvPr/>
         </p:nvSpPr>
@@ -40313,7 +40313,7 @@
       </p:sp>
       <p:sp>
         <p:nvSpPr>
-          <p:cNvPr id="21" name="Text 19"/>
+          <p:cNvPr id="22" name="Text 19"/>
           <p:cNvSpPr txBox="1"/>
           <p:nvPr/>
         </p:nvSpPr>
@@ -40349,7 +40349,7 @@
       </p:sp>
       <p:sp>
         <p:nvSpPr>
-          <p:cNvPr id="22" name="dot"/>
+          <p:cNvPr id="23" name="dot"/>
           <p:cNvSpPr/>
           <p:nvPr/>
         </p:nvSpPr>
@@ -40374,7 +40374,7 @@
       </p:sp>
       <p:sp>
         <p:nvSpPr>
-          <p:cNvPr id="23" name="Text 21"/>
+          <p:cNvPr id="24" name="Text 21"/>
           <p:cNvSpPr txBox="1"/>
           <p:nvPr/>
         </p:nvSpPr>
@@ -40410,7 +40410,7 @@
       </p:sp>
       <p:sp>
         <p:nvSpPr>
-          <p:cNvPr id="24" name="tl 위성·해류 · 서비스"/>
+          <p:cNvPr id="25" name="tl 위성·해류 · 서비스"/>
           <p:cNvSpPr/>
           <p:nvPr/>
         </p:nvSpPr>
@@ -40444,7 +40444,7 @@
       </p:sp>
       <p:sp>
         <p:nvSpPr>
-          <p:cNvPr id="25" name="Text 23"/>
+          <p:cNvPr id="26" name="Text 23"/>
           <p:cNvSpPr txBox="1"/>
           <p:nvPr/>
         </p:nvSpPr>
@@ -40480,7 +40480,7 @@
       </p:sp>
       <p:sp>
         <p:nvSpPr>
-          <p:cNvPr id="26" name="Text 24"/>
+          <p:cNvPr id="27" name="Text 24"/>
           <p:cNvSpPr txBox="1"/>
           <p:nvPr/>
         </p:nvSpPr>
@@ -40516,7 +40516,7 @@
       </p:sp>
       <p:sp>
         <p:nvSpPr>
-          <p:cNvPr id="27" name="card 만들었다가 접은 것"/>
+          <p:cNvPr id="28" name="card 만들었다가 접은 것"/>
           <p:cNvSpPr/>
           <p:nvPr/>
         </p:nvSpPr>
@@ -40550,7 +40550,7 @@
       </p:sp>
       <p:sp>
         <p:nvSpPr>
-          <p:cNvPr id="28" name="icon circle"/>
+          <p:cNvPr id="29" name="icon circle"/>
           <p:cNvSpPr/>
           <p:nvPr/>
         </p:nvSpPr>
@@ -40575,7 +40575,7 @@
       </p:sp>
       <p:pic>
         <p:nvPicPr>
-          <p:cNvPr id="29" name="icon FaTimesCircle" descr="preencoded.png">    </p:cNvPr>
+          <p:cNvPr id="30" name="icon FaTimesCircle" descr="preencoded.png">    </p:cNvPr>
           <p:cNvPicPr>
             <a:picLocks noChangeAspect="1"/>
           </p:cNvPicPr>
@@ -40599,7 +40599,7 @@
       </p:pic>
       <p:sp>
         <p:nvSpPr>
-          <p:cNvPr id="30" name="Text 27"/>
+          <p:cNvPr id="31" name="Text 27"/>
           <p:cNvSpPr txBox="1"/>
           <p:nvPr/>
         </p:nvSpPr>
@@ -40635,7 +40635,7 @@
       </p:sp>
       <p:sp>
         <p:nvSpPr>
-          <p:cNvPr id="31" name="Text 28"/>
+          <p:cNvPr id="32" name="Text 28"/>
           <p:cNvSpPr txBox="1"/>
           <p:nvPr/>
         </p:nvSpPr>
@@ -40674,7 +40674,7 @@
       </p:sp>
       <p:sp>
         <p:nvSpPr>
-          <p:cNvPr id="32" name="card 고친 것"/>
+          <p:cNvPr id="33" name="card 고친 것"/>
           <p:cNvSpPr/>
           <p:nvPr/>
         </p:nvSpPr>
@@ -40708,7 +40708,7 @@
       </p:sp>
       <p:sp>
         <p:nvSpPr>
-          <p:cNvPr id="33" name="icon circle"/>
+          <p:cNvPr id="34" name="icon circle"/>
           <p:cNvSpPr/>
           <p:nvPr/>
         </p:nvSpPr>
@@ -40733,7 +40733,7 @@
       </p:sp>
       <p:pic>
         <p:nvPicPr>
-          <p:cNvPr id="34" name="icon FaSync" descr="preencoded.png">    </p:cNvPr>
+          <p:cNvPr id="35" name="icon FaSync" descr="preencoded.png">    </p:cNvPr>
           <p:cNvPicPr>
             <a:picLocks noChangeAspect="1"/>
           </p:cNvPicPr>
@@ -40757,7 +40757,7 @@
       </p:pic>
       <p:sp>
         <p:nvSpPr>
-          <p:cNvPr id="35" name="Text 31"/>
+          <p:cNvPr id="36" name="Text 31"/>
           <p:cNvSpPr txBox="1"/>
           <p:nvPr/>
         </p:nvSpPr>
@@ -40793,7 +40793,7 @@
       </p:sp>
       <p:sp>
         <p:nvSpPr>
-          <p:cNvPr id="36" name="Text 32"/>
+          <p:cNvPr id="37" name="Text 32"/>
           <p:cNvSpPr txBox="1"/>
           <p:nvPr/>
         </p:nvSpPr>
@@ -40832,7 +40832,7 @@
       </p:sp>
       <p:sp>
         <p:nvSpPr>
-          <p:cNvPr id="37" name="source"/>
+          <p:cNvPr id="38" name="source"/>
           <p:cNvSpPr txBox="1"/>
           <p:nvPr/>
         </p:nvSpPr>
@@ -40868,7 +40868,7 @@
       </p:sp>
       <p:sp>
         <p:nvSpPr>
-          <p:cNvPr id="25" name="Slide Number Placeholder 0"/>
+          <p:cNvPr id="39" name="Slide Number Placeholder 0"/>
           <p:cNvSpPr>
             <a:spLocks noGrp="1"/>
           </p:cNvSpPr>
@@ -40924,7 +40924,7 @@
   <p:cSld name="Slide 6">
     <p:spTree>
       <p:nvGrpSpPr>
-        <p:cNvPr id="1" name=""/>
+        <p:cNvPr id="2" name=""/>
         <p:cNvGrpSpPr/>
         <p:nvPr/>
       </p:nvGrpSpPr>
@@ -40938,7 +40938,7 @@
       </p:grpSpPr>
       <p:sp>
         <p:nvSpPr>
-          <p:cNvPr id="2" name="Text 0"/>
+          <p:cNvPr id="3" name="Text 0"/>
           <p:cNvSpPr/>
           <p:nvPr>
             <p:ph idx="100" type="title" hasCustomPrompt="1"/>
@@ -40976,7 +40976,7 @@
       </p:sp>
       <p:sp>
         <p:nvSpPr>
-          <p:cNvPr id="3" name="subtitle"/>
+          <p:cNvPr id="4" name="subtitle"/>
           <p:cNvSpPr txBox="1"/>
           <p:nvPr/>
         </p:nvSpPr>
@@ -41012,7 +41012,7 @@
       </p:sp>
       <p:sp>
         <p:nvSpPr>
-          <p:cNvPr id="4" name="card 찾기: 드론 사진의 드론 GPS가 곧 쓰레기 위치"/>
+          <p:cNvPr id="5" name="card 찾기: 드론 사진의 드론 GPS가 곧 쓰레기 위치"/>
           <p:cNvSpPr/>
           <p:nvPr/>
         </p:nvSpPr>
@@ -41046,7 +41046,7 @@
       </p:sp>
       <p:sp>
         <p:nvSpPr>
-          <p:cNvPr id="5" name="icon circle"/>
+          <p:cNvPr id="6" name="icon circle"/>
           <p:cNvSpPr/>
           <p:nvPr/>
         </p:nvSpPr>
@@ -41071,7 +41071,7 @@
       </p:sp>
       <p:pic>
         <p:nvPicPr>
-          <p:cNvPr id="6" name="icon FaEye" descr="preencoded.png">    </p:cNvPr>
+          <p:cNvPr id="7" name="icon FaEye" descr="preencoded.png">    </p:cNvPr>
           <p:cNvPicPr>
             <a:picLocks noChangeAspect="1"/>
           </p:cNvPicPr>
@@ -41095,7 +41095,7 @@
       </p:pic>
       <p:sp>
         <p:nvSpPr>
-          <p:cNvPr id="7" name="Text 4"/>
+          <p:cNvPr id="8" name="Text 4"/>
           <p:cNvSpPr txBox="1"/>
           <p:nvPr/>
         </p:nvSpPr>
@@ -41131,7 +41131,7 @@
       </p:sp>
       <p:sp>
         <p:nvSpPr>
-          <p:cNvPr id="8" name="Text 5"/>
+          <p:cNvPr id="9" name="Text 5"/>
           <p:cNvSpPr txBox="1"/>
           <p:nvPr/>
         </p:nvSpPr>
@@ -41170,7 +41170,7 @@
       </p:sp>
       <p:sp>
         <p:nvSpPr>
-          <p:cNvPr id="9" name="tag"/>
+          <p:cNvPr id="10" name="tag"/>
           <p:cNvSpPr/>
           <p:nvPr/>
         </p:nvSpPr>
@@ -41197,7 +41197,7 @@
       </p:sp>
       <p:sp>
         <p:nvSpPr>
-          <p:cNvPr id="10" name="Text 7"/>
+          <p:cNvPr id="11" name="Text 7"/>
           <p:cNvSpPr txBox="1"/>
           <p:nvPr/>
         </p:nvSpPr>
@@ -41233,7 +41233,7 @@
       </p:sp>
       <p:sp>
         <p:nvSpPr>
-          <p:cNvPr id="11" name="card 무게: 라벨 면적 × 재질 계수"/>
+          <p:cNvPr id="12" name="card 무게: 라벨 면적 × 재질 계수"/>
           <p:cNvSpPr/>
           <p:nvPr/>
         </p:nvSpPr>
@@ -41267,7 +41267,7 @@
       </p:sp>
       <p:sp>
         <p:nvSpPr>
-          <p:cNvPr id="12" name="icon circle"/>
+          <p:cNvPr id="13" name="icon circle"/>
           <p:cNvSpPr/>
           <p:nvPr/>
         </p:nvSpPr>
@@ -41292,7 +41292,7 @@
       </p:sp>
       <p:pic>
         <p:nvPicPr>
-          <p:cNvPr id="13" name="icon FaCalculator" descr="preencoded.png">    </p:cNvPr>
+          <p:cNvPr id="14" name="icon FaCalculator" descr="preencoded.png">    </p:cNvPr>
           <p:cNvPicPr>
             <a:picLocks noChangeAspect="1"/>
           </p:cNvPicPr>
@@ -41316,7 +41316,7 @@
       </p:pic>
       <p:sp>
         <p:nvSpPr>
-          <p:cNvPr id="14" name="Text 10"/>
+          <p:cNvPr id="15" name="Text 10"/>
           <p:cNvSpPr txBox="1"/>
           <p:nvPr/>
         </p:nvSpPr>
@@ -41352,7 +41352,7 @@
       </p:sp>
       <p:sp>
         <p:nvSpPr>
-          <p:cNvPr id="15" name="Text 11"/>
+          <p:cNvPr id="16" name="Text 11"/>
           <p:cNvSpPr txBox="1"/>
           <p:nvPr/>
         </p:nvSpPr>
@@ -41391,7 +41391,7 @@
       </p:sp>
       <p:sp>
         <p:nvSpPr>
-          <p:cNvPr id="16" name="tag"/>
+          <p:cNvPr id="17" name="tag"/>
           <p:cNvSpPr/>
           <p:nvPr/>
         </p:nvSpPr>
@@ -41418,7 +41418,7 @@
       </p:sp>
       <p:sp>
         <p:nvSpPr>
-          <p:cNvPr id="17" name="Text 13"/>
+          <p:cNvPr id="18" name="Text 13"/>
           <p:cNvSpPr txBox="1"/>
           <p:nvPr/>
         </p:nvSpPr>
@@ -41454,7 +41454,7 @@
       </p:sp>
       <p:sp>
         <p:nvSpPr>
-          <p:cNvPr id="18" name="card 배차: 경험으로 트럭·마대·인원"/>
+          <p:cNvPr id="19" name="card 배차: 경험으로 트럭·마대·인원"/>
           <p:cNvSpPr/>
           <p:nvPr/>
         </p:nvSpPr>
@@ -41488,7 +41488,7 @@
       </p:sp>
       <p:sp>
         <p:nvSpPr>
-          <p:cNvPr id="19" name="icon circle"/>
+          <p:cNvPr id="20" name="icon circle"/>
           <p:cNvSpPr/>
           <p:nvPr/>
         </p:nvSpPr>
@@ -41513,7 +41513,7 @@
       </p:sp>
       <p:pic>
         <p:nvPicPr>
-          <p:cNvPr id="20" name="icon FaTruck" descr="preencoded.png">    </p:cNvPr>
+          <p:cNvPr id="21" name="icon FaTruck" descr="preencoded.png">    </p:cNvPr>
           <p:cNvPicPr>
             <a:picLocks noChangeAspect="1"/>
           </p:cNvPicPr>
@@ -41537,7 +41537,7 @@
       </p:pic>
       <p:sp>
         <p:nvSpPr>
-          <p:cNvPr id="21" name="Text 16"/>
+          <p:cNvPr id="22" name="Text 16"/>
           <p:cNvSpPr txBox="1"/>
           <p:nvPr/>
         </p:nvSpPr>
@@ -41573,7 +41573,7 @@
       </p:sp>
       <p:sp>
         <p:nvSpPr>
-          <p:cNvPr id="22" name="Text 17"/>
+          <p:cNvPr id="23" name="Text 17"/>
           <p:cNvSpPr txBox="1"/>
           <p:nvPr/>
         </p:nvSpPr>
@@ -41612,7 +41612,7 @@
       </p:sp>
       <p:sp>
         <p:nvSpPr>
-          <p:cNvPr id="23" name="tag"/>
+          <p:cNvPr id="24" name="tag"/>
           <p:cNvSpPr/>
           <p:nvPr/>
         </p:nvSpPr>
@@ -41639,7 +41639,7 @@
       </p:sp>
       <p:sp>
         <p:nvSpPr>
-          <p:cNvPr id="24" name="Text 19"/>
+          <p:cNvPr id="25" name="Text 19"/>
           <p:cNvSpPr txBox="1"/>
           <p:nvPr/>
         </p:nvSpPr>
@@ -41675,7 +41675,7 @@
       </p:sp>
       <p:sp>
         <p:nvSpPr>
-          <p:cNvPr id="25" name="callout"/>
+          <p:cNvPr id="26" name="callout"/>
           <p:cNvSpPr/>
           <p:nvPr/>
         </p:nvSpPr>
@@ -41702,7 +41702,7 @@
       </p:sp>
       <p:sp>
         <p:nvSpPr>
-          <p:cNvPr id="26" name="Text 21"/>
+          <p:cNvPr id="27" name="Text 21"/>
           <p:cNvSpPr txBox="1"/>
           <p:nvPr/>
         </p:nvSpPr>
@@ -41738,7 +41738,7 @@
       </p:sp>
       <p:sp>
         <p:nvSpPr>
-          <p:cNvPr id="27" name="source"/>
+          <p:cNvPr id="28" name="source"/>
           <p:cNvSpPr txBox="1"/>
           <p:nvPr/>
         </p:nvSpPr>
@@ -41774,7 +41774,7 @@
       </p:sp>
       <p:sp>
         <p:nvSpPr>
-          <p:cNvPr id="25" name="Slide Number Placeholder 0"/>
+          <p:cNvPr id="29" name="Slide Number Placeholder 0"/>
           <p:cNvSpPr>
             <a:spLocks noGrp="1"/>
           </p:cNvSpPr>
@@ -41830,7 +41830,7 @@
   <p:cSld name="Slide 7">
     <p:spTree>
       <p:nvGrpSpPr>
-        <p:cNvPr id="1" name=""/>
+        <p:cNvPr id="2" name=""/>
         <p:cNvGrpSpPr/>
         <p:nvPr/>
       </p:nvGrpSpPr>
@@ -41844,7 +41844,7 @@
       </p:grpSpPr>
       <p:sp>
         <p:nvSpPr>
-          <p:cNvPr id="2" name="Text 0"/>
+          <p:cNvPr id="3" name="Text 0"/>
           <p:cNvSpPr/>
           <p:nvPr>
             <p:ph idx="100" type="title" hasCustomPrompt="1"/>
@@ -41882,7 +41882,7 @@
       </p:sp>
       <p:sp>
         <p:nvSpPr>
-          <p:cNvPr id="3" name="Text 1"/>
+          <p:cNvPr id="4" name="Text 1"/>
           <p:cNvSpPr txBox="1"/>
           <p:nvPr/>
         </p:nvSpPr>
@@ -41918,7 +41918,7 @@
       </p:sp>
       <p:pic>
         <p:nvPicPr>
-          <p:cNvPr id="4" name="업체 라벨 기록 무게 vs 현실 범위" descr="/tmp/claude-0/-home-user-hsr1m/6022f0b4-b8f8-52b0-8810-837ebd6bfbe9/scratchpad/deck/img/fig_12_업체라벨_기록무게_vs_현실범위.jpg">    </p:cNvPr>
+          <p:cNvPr id="5" name="업체 라벨 기록 무게 vs 현실 범위" descr="/tmp/claude-0/-home-user-hsr1m/6022f0b4-b8f8-52b0-8810-837ebd6bfbe9/scratchpad/deck/img/fig_12_업체라벨_기록무게_vs_현실범위.jpg">    </p:cNvPr>
           <p:cNvPicPr>
             <a:picLocks noChangeAspect="1"/>
           </p:cNvPicPr>
@@ -41941,7 +41941,7 @@
       </p:pic>
       <p:sp>
         <p:nvSpPr>
-          <p:cNvPr id="5" name="Text 2"/>
+          <p:cNvPr id="6" name="Text 2"/>
           <p:cNvSpPr txBox="1"/>
           <p:nvPr/>
         </p:nvSpPr>
@@ -41977,7 +41977,7 @@
       </p:sp>
       <p:sp>
         <p:nvSpPr>
-          <p:cNvPr id="6" name="stat 업체 기록 합계"/>
+          <p:cNvPr id="7" name="stat 업체 기록 합계"/>
           <p:cNvSpPr/>
           <p:nvPr/>
         </p:nvSpPr>
@@ -42004,7 +42004,7 @@
       </p:sp>
       <p:sp>
         <p:nvSpPr>
-          <p:cNvPr id="7" name="Text 4"/>
+          <p:cNvPr id="8" name="Text 4"/>
           <p:cNvSpPr txBox="1"/>
           <p:nvPr/>
         </p:nvSpPr>
@@ -42040,7 +42040,7 @@
       </p:sp>
       <p:sp>
         <p:nvSpPr>
-          <p:cNvPr id="8" name="Text 5"/>
+          <p:cNvPr id="9" name="Text 5"/>
           <p:cNvSpPr txBox="1"/>
           <p:nvPr/>
         </p:nvSpPr>
@@ -42087,7 +42087,7 @@
       </p:sp>
       <p:sp>
         <p:nvSpPr>
-          <p:cNvPr id="9" name="Text 6"/>
+          <p:cNvPr id="10" name="Text 6"/>
           <p:cNvSpPr txBox="1"/>
           <p:nvPr/>
         </p:nvSpPr>
@@ -42123,7 +42123,7 @@
       </p:sp>
       <p:sp>
         <p:nvSpPr>
-          <p:cNvPr id="10" name="stat 3D 부피 × 밀도"/>
+          <p:cNvPr id="11" name="stat 3D 부피 × 밀도"/>
           <p:cNvSpPr/>
           <p:nvPr/>
         </p:nvSpPr>
@@ -42150,7 +42150,7 @@
       </p:sp>
       <p:sp>
         <p:nvSpPr>
-          <p:cNvPr id="11" name="Text 8"/>
+          <p:cNvPr id="12" name="Text 8"/>
           <p:cNvSpPr txBox="1"/>
           <p:nvPr/>
         </p:nvSpPr>
@@ -42186,7 +42186,7 @@
       </p:sp>
       <p:sp>
         <p:nvSpPr>
-          <p:cNvPr id="12" name="Text 9"/>
+          <p:cNvPr id="13" name="Text 9"/>
           <p:cNvSpPr txBox="1"/>
           <p:nvPr/>
         </p:nvSpPr>
@@ -42233,7 +42233,7 @@
       </p:sp>
       <p:sp>
         <p:nvSpPr>
-          <p:cNvPr id="13" name="Text 10"/>
+          <p:cNvPr id="14" name="Text 10"/>
           <p:cNvSpPr txBox="1"/>
           <p:nvPr/>
         </p:nvSpPr>
@@ -42269,7 +42269,7 @@
       </p:sp>
       <p:sp>
         <p:nvSpPr>
-          <p:cNvPr id="14" name="stat 차이"/>
+          <p:cNvPr id="15" name="stat 차이"/>
           <p:cNvSpPr/>
           <p:nvPr/>
         </p:nvSpPr>
@@ -42296,7 +42296,7 @@
       </p:sp>
       <p:sp>
         <p:nvSpPr>
-          <p:cNvPr id="15" name="Text 12"/>
+          <p:cNvPr id="16" name="Text 12"/>
           <p:cNvSpPr txBox="1"/>
           <p:nvPr/>
         </p:nvSpPr>
@@ -42332,7 +42332,7 @@
       </p:sp>
       <p:sp>
         <p:nvSpPr>
-          <p:cNvPr id="16" name="Text 13"/>
+          <p:cNvPr id="17" name="Text 13"/>
           <p:cNvSpPr txBox="1"/>
           <p:nvPr/>
         </p:nvSpPr>
@@ -42379,7 +42379,7 @@
       </p:sp>
       <p:sp>
         <p:nvSpPr>
-          <p:cNvPr id="17" name="Text 14"/>
+          <p:cNvPr id="18" name="Text 14"/>
           <p:cNvSpPr txBox="1"/>
           <p:nvPr/>
         </p:nvSpPr>
@@ -42415,7 +42415,7 @@
       </p:sp>
       <p:sp>
         <p:nvSpPr>
-          <p:cNvPr id="18" name="stat 마대 계획 (20 kg 기준)"/>
+          <p:cNvPr id="19" name="stat 마대 계획 (20 kg 기준)"/>
           <p:cNvSpPr/>
           <p:nvPr/>
         </p:nvSpPr>
@@ -42442,7 +42442,7 @@
       </p:sp>
       <p:sp>
         <p:nvSpPr>
-          <p:cNvPr id="19" name="Text 16"/>
+          <p:cNvPr id="20" name="Text 16"/>
           <p:cNvSpPr txBox="1"/>
           <p:nvPr/>
         </p:nvSpPr>
@@ -42478,7 +42478,7 @@
       </p:sp>
       <p:sp>
         <p:nvSpPr>
-          <p:cNvPr id="20" name="Text 17"/>
+          <p:cNvPr id="21" name="Text 17"/>
           <p:cNvSpPr txBox="1"/>
           <p:nvPr/>
         </p:nvSpPr>
@@ -42525,7 +42525,7 @@
       </p:sp>
       <p:sp>
         <p:nvSpPr>
-          <p:cNvPr id="21" name="Text 18"/>
+          <p:cNvPr id="22" name="Text 18"/>
           <p:cNvSpPr txBox="1"/>
           <p:nvPr/>
         </p:nvSpPr>
@@ -42561,7 +42561,7 @@
       </p:sp>
       <p:sp>
         <p:nvSpPr>
-          <p:cNvPr id="22" name="money card"/>
+          <p:cNvPr id="23" name="money card"/>
           <p:cNvSpPr/>
           <p:nvPr/>
         </p:nvSpPr>
@@ -42588,7 +42588,7 @@
       </p:sp>
       <p:pic>
         <p:nvPicPr>
-          <p:cNvPr id="23" name="icon coins" descr="preencoded.png">    </p:cNvPr>
+          <p:cNvPr id="24" name="icon coins" descr="preencoded.png">    </p:cNvPr>
           <p:cNvPicPr>
             <a:picLocks noChangeAspect="1"/>
           </p:cNvPicPr>
@@ -42612,7 +42612,7 @@
       </p:pic>
       <p:sp>
         <p:nvSpPr>
-          <p:cNvPr id="24" name="Text 20"/>
+          <p:cNvPr id="25" name="Text 20"/>
           <p:cNvSpPr txBox="1"/>
           <p:nvPr/>
         </p:nvSpPr>
@@ -42648,7 +42648,7 @@
       </p:sp>
       <p:sp>
         <p:nvSpPr>
-          <p:cNvPr id="25" name="Text 21"/>
+          <p:cNvPr id="26" name="Text 21"/>
           <p:cNvSpPr txBox="1"/>
           <p:nvPr/>
         </p:nvSpPr>
@@ -42684,7 +42684,7 @@
       </p:sp>
       <p:sp>
         <p:nvSpPr>
-          <p:cNvPr id="26" name="source"/>
+          <p:cNvPr id="27" name="source"/>
           <p:cNvSpPr txBox="1"/>
           <p:nvPr/>
         </p:nvSpPr>
@@ -42720,7 +42720,7 @@
       </p:sp>
       <p:sp>
         <p:nvSpPr>
-          <p:cNvPr id="25" name="Slide Number Placeholder 0"/>
+          <p:cNvPr id="28" name="Slide Number Placeholder 0"/>
           <p:cNvSpPr>
             <a:spLocks noGrp="1"/>
           </p:cNvSpPr>
